--- a/ADG/_실측판/12장/12장_LogicalStandby와SQLApply.pptx
+++ b/ADG/_실측판/12장/12장_LogicalStandby와SQLApply.pptx
@@ -5830,7 +5830,17 @@
                 </a:solidFill>
                 <a:latin typeface="맑은 고딕"/>
               </a:rPr>
-              <a:t>•  기본 35개 규칙 대부분이 `INTERNAL SCHEMA`</a:t>
+              <a:t>•  기본 35개 규칙 대부분이 </a:t>
+            </a:r>
+            <a:r>
+              <a:rPr sz="1700" b="0">
+                <a:solidFill>
+                  <a:srgbClr val="222222"/>
+                </a:solidFill>
+                <a:latin typeface="Consolas"/>
+                <a:cs typeface="Consolas"/>
+              </a:rPr>
+              <a:t>INTERNAL SCHEMA</a:t>
             </a:r>
           </a:p>
           <a:p>
@@ -5846,7 +5856,121 @@
                 </a:solidFill>
                 <a:latin typeface="맑은 고딕"/>
               </a:rPr>
-              <a:t>•  `SYS` / `SYSTEM` / `XS$NULL` / `OJVMSYS` / `DBSNMP` / `GGSYS` …</a:t>
+              <a:t>•  </a:t>
+            </a:r>
+            <a:r>
+              <a:rPr sz="1700" b="0">
+                <a:solidFill>
+                  <a:srgbClr val="222222"/>
+                </a:solidFill>
+                <a:latin typeface="Consolas"/>
+                <a:cs typeface="Consolas"/>
+              </a:rPr>
+              <a:t>SYS</a:t>
+            </a:r>
+            <a:r>
+              <a:rPr sz="1700" b="0">
+                <a:solidFill>
+                  <a:srgbClr val="222222"/>
+                </a:solidFill>
+                <a:latin typeface="맑은 고딕"/>
+              </a:rPr>
+              <a:t> / </a:t>
+            </a:r>
+            <a:r>
+              <a:rPr sz="1700" b="0">
+                <a:solidFill>
+                  <a:srgbClr val="222222"/>
+                </a:solidFill>
+                <a:latin typeface="Consolas"/>
+                <a:cs typeface="Consolas"/>
+              </a:rPr>
+              <a:t>SYSTEM</a:t>
+            </a:r>
+            <a:r>
+              <a:rPr sz="1700" b="0">
+                <a:solidFill>
+                  <a:srgbClr val="222222"/>
+                </a:solidFill>
+                <a:latin typeface="맑은 고딕"/>
+              </a:rPr>
+              <a:t> / </a:t>
+            </a:r>
+            <a:r>
+              <a:rPr sz="1700" b="0">
+                <a:solidFill>
+                  <a:srgbClr val="222222"/>
+                </a:solidFill>
+                <a:latin typeface="Consolas"/>
+                <a:cs typeface="Consolas"/>
+              </a:rPr>
+              <a:t>XS$NULL</a:t>
+            </a:r>
+            <a:r>
+              <a:rPr sz="1700" b="0">
+                <a:solidFill>
+                  <a:srgbClr val="222222"/>
+                </a:solidFill>
+                <a:latin typeface="맑은 고딕"/>
+              </a:rPr>
+              <a:t> / </a:t>
+            </a:r>
+            <a:r>
+              <a:rPr sz="1700" b="0">
+                <a:solidFill>
+                  <a:srgbClr val="222222"/>
+                </a:solidFill>
+                <a:latin typeface="Consolas"/>
+                <a:cs typeface="Consolas"/>
+              </a:rPr>
+              <a:t>OJVMSYS</a:t>
+            </a:r>
+            <a:r>
+              <a:rPr sz="1700" b="0">
+                <a:solidFill>
+                  <a:srgbClr val="222222"/>
+                </a:solidFill>
+                <a:latin typeface="맑은 고딕"/>
+              </a:rPr>
+              <a:t> / </a:t>
+            </a:r>
+            <a:r>
+              <a:rPr sz="1700" b="0">
+                <a:solidFill>
+                  <a:srgbClr val="222222"/>
+                </a:solidFill>
+                <a:latin typeface="Consolas"/>
+                <a:cs typeface="Consolas"/>
+              </a:rPr>
+              <a:t>DBSNMP</a:t>
+            </a:r>
+            <a:r>
+              <a:rPr sz="1700" b="0">
+                <a:solidFill>
+                  <a:srgbClr val="222222"/>
+                </a:solidFill>
+                <a:latin typeface="맑은 고딕"/>
+              </a:rPr>
+              <a:t> / </a:t>
+            </a:r>
+            <a:r>
+              <a:rPr sz="1700" b="0">
+                <a:solidFill>
+                  <a:srgbClr val="222222"/>
+                </a:solidFill>
+                <a:latin typeface="Consolas"/>
+                <a:cs typeface="Consolas"/>
+              </a:rPr>
+              <a:t>GGSYS</a:t>
+            </a:r>
+            <a:r>
+              <a:rPr sz="1700" b="0">
+                <a:solidFill>
+                  <a:srgbClr val="222222"/>
+                </a:solidFill>
+                <a:latin typeface="맑은 고딕"/>
+              </a:rPr>
+              <a:t> …</a:t>
             </a:r>
           </a:p>
           <a:p>
@@ -5862,7 +5986,35 @@
                 </a:solidFill>
                 <a:latin typeface="맑은 고딕"/>
               </a:rPr>
-              <a:t>•  실측 — `system.lg_skip` 조회 시 **ORA-00942**</a:t>
+              <a:t>•  실측 — </a:t>
+            </a:r>
+            <a:r>
+              <a:rPr sz="1700" b="0">
+                <a:solidFill>
+                  <a:srgbClr val="222222"/>
+                </a:solidFill>
+                <a:latin typeface="Consolas"/>
+                <a:cs typeface="Consolas"/>
+              </a:rPr>
+              <a:t>system.lg_skip</a:t>
+            </a:r>
+            <a:r>
+              <a:rPr sz="1700" b="0">
+                <a:solidFill>
+                  <a:srgbClr val="222222"/>
+                </a:solidFill>
+                <a:latin typeface="맑은 고딕"/>
+              </a:rPr>
+              <a:t> 조회 시 </a:t>
+            </a:r>
+            <a:r>
+              <a:rPr sz="1700" b="1">
+                <a:solidFill>
+                  <a:srgbClr val="222222"/>
+                </a:solidFill>
+                <a:latin typeface="맑은 고딕"/>
+              </a:rPr>
+              <a:t>ORA-00942</a:t>
             </a:r>
           </a:p>
           <a:p>
@@ -5878,7 +6030,26 @@
                 </a:solidFill>
                 <a:latin typeface="맑은 고딕"/>
               </a:rPr>
-              <a:t>•  반면 일반 스키마 `lgu.t1` 은 정상 복제</a:t>
+              <a:t>•  반면 일반 스키마 </a:t>
+            </a:r>
+            <a:r>
+              <a:rPr sz="1700" b="0">
+                <a:solidFill>
+                  <a:srgbClr val="222222"/>
+                </a:solidFill>
+                <a:latin typeface="Consolas"/>
+                <a:cs typeface="Consolas"/>
+              </a:rPr>
+              <a:t>lgu.t1</a:t>
+            </a:r>
+            <a:r>
+              <a:rPr sz="1700" b="0">
+                <a:solidFill>
+                  <a:srgbClr val="222222"/>
+                </a:solidFill>
+                <a:latin typeface="맑은 고딕"/>
+              </a:rPr>
+              <a:t> 은 정상 복제</a:t>
             </a:r>
           </a:p>
         </p:txBody>
@@ -6073,7 +6244,16 @@
                 </a:solidFill>
                 <a:latin typeface="맑은 고딕"/>
               </a:rPr>
-              <a:t>•  없는 것 — **그 행이 논리적으로 무엇인지**</a:t>
+              <a:t>•  없는 것 — </a:t>
+            </a:r>
+            <a:r>
+              <a:rPr sz="1700" b="1">
+                <a:solidFill>
+                  <a:srgbClr val="222222"/>
+                </a:solidFill>
+                <a:latin typeface="맑은 고딕"/>
+              </a:rPr>
+              <a:t>그 행이 논리적으로 무엇인지</a:t>
             </a:r>
           </a:p>
           <a:p>
@@ -6105,7 +6285,26 @@
                 </a:solidFill>
                 <a:latin typeface="맑은 고딕"/>
               </a:rPr>
-              <a:t>•  `FORCE_LOGGING` 과 다르다 — 남기느냐 vs 무엇을 더 담느냐</a:t>
+              <a:t>•  </a:t>
+            </a:r>
+            <a:r>
+              <a:rPr sz="1700" b="0">
+                <a:solidFill>
+                  <a:srgbClr val="222222"/>
+                </a:solidFill>
+                <a:latin typeface="Consolas"/>
+                <a:cs typeface="Consolas"/>
+              </a:rPr>
+              <a:t>FORCE_LOGGING</a:t>
+            </a:r>
+            <a:r>
+              <a:rPr sz="1700" b="0">
+                <a:solidFill>
+                  <a:srgbClr val="222222"/>
+                </a:solidFill>
+                <a:latin typeface="맑은 고딕"/>
+              </a:rPr>
+              <a:t> 과 다르다 — 남기느냐 vs 무엇을 더 담느냐</a:t>
             </a:r>
           </a:p>
         </p:txBody>
@@ -6523,7 +6722,25 @@
                 </a:solidFill>
                 <a:latin typeface="맑은 고딕"/>
               </a:rPr>
-              <a:t>•  Physical → Snapshot — **가능** (보장 복원 지점)</a:t>
+              <a:t>•  Physical → Snapshot — </a:t>
+            </a:r>
+            <a:r>
+              <a:rPr sz="1700" b="1">
+                <a:solidFill>
+                  <a:srgbClr val="222222"/>
+                </a:solidFill>
+                <a:latin typeface="맑은 고딕"/>
+              </a:rPr>
+              <a:t>가능</a:t>
+            </a:r>
+            <a:r>
+              <a:rPr sz="1700" b="0">
+                <a:solidFill>
+                  <a:srgbClr val="222222"/>
+                </a:solidFill>
+                <a:latin typeface="맑은 고딕"/>
+              </a:rPr>
+              <a:t> (보장 복원 지점)</a:t>
             </a:r>
           </a:p>
           <a:p>
@@ -6539,7 +6756,25 @@
                 </a:solidFill>
                 <a:latin typeface="맑은 고딕"/>
               </a:rPr>
-              <a:t>•  Snapshot → Physical — **가능** (같은 복원 지점)</a:t>
+              <a:t>•  Snapshot → Physical — </a:t>
+            </a:r>
+            <a:r>
+              <a:rPr sz="1700" b="1">
+                <a:solidFill>
+                  <a:srgbClr val="222222"/>
+                </a:solidFill>
+                <a:latin typeface="맑은 고딕"/>
+              </a:rPr>
+              <a:t>가능</a:t>
+            </a:r>
+            <a:r>
+              <a:rPr sz="1700" b="0">
+                <a:solidFill>
+                  <a:srgbClr val="222222"/>
+                </a:solidFill>
+                <a:latin typeface="맑은 고딕"/>
+              </a:rPr>
+              <a:t> (같은 복원 지점)</a:t>
             </a:r>
           </a:p>
           <a:p>
@@ -6555,7 +6790,34 @@
                 </a:solidFill>
                 <a:latin typeface="맑은 고딕"/>
               </a:rPr>
-              <a:t>•  Physical → **Logical** — **불가능**</a:t>
+              <a:t>•  Physical → </a:t>
+            </a:r>
+            <a:r>
+              <a:rPr sz="1700" b="1">
+                <a:solidFill>
+                  <a:srgbClr val="222222"/>
+                </a:solidFill>
+                <a:latin typeface="맑은 고딕"/>
+              </a:rPr>
+              <a:t>Logical</a:t>
+            </a:r>
+            <a:r>
+              <a:rPr sz="1700" b="0">
+                <a:solidFill>
+                  <a:srgbClr val="222222"/>
+                </a:solidFill>
+                <a:latin typeface="맑은 고딕"/>
+              </a:rPr>
+              <a:t> — </a:t>
+            </a:r>
+            <a:r>
+              <a:rPr sz="1700" b="1">
+                <a:solidFill>
+                  <a:srgbClr val="222222"/>
+                </a:solidFill>
+                <a:latin typeface="맑은 고딕"/>
+              </a:rPr>
+              <a:t>불가능</a:t>
             </a:r>
           </a:p>
           <a:p>
@@ -6571,7 +6833,16 @@
                 </a:solidFill>
                 <a:latin typeface="맑은 고딕"/>
               </a:rPr>
-              <a:t>•  Logical → Physical — **불가능. 다시 만들어야 한다**</a:t>
+              <a:t>•  Logical → Physical — </a:t>
+            </a:r>
+            <a:r>
+              <a:rPr sz="1700" b="1">
+                <a:solidFill>
+                  <a:srgbClr val="222222"/>
+                </a:solidFill>
+                <a:latin typeface="맑은 고딕"/>
+              </a:rPr>
+              <a:t>불가능. 다시 만들어야 한다</a:t>
             </a:r>
           </a:p>
           <a:p>
@@ -6766,7 +7037,26 @@
                 </a:solidFill>
                 <a:latin typeface="맑은 고딕"/>
               </a:rPr>
-              <a:t>•  실습 — `vmrun snapshot ... pre-logical` (두 노드, 실행 중 상태)</a:t>
+              <a:t>•  실습 — </a:t>
+            </a:r>
+            <a:r>
+              <a:rPr sz="1700" b="0">
+                <a:solidFill>
+                  <a:srgbClr val="222222"/>
+                </a:solidFill>
+                <a:latin typeface="Consolas"/>
+                <a:cs typeface="Consolas"/>
+              </a:rPr>
+              <a:t>vmrun snapshot ... pre-logical</a:t>
+            </a:r>
+            <a:r>
+              <a:rPr sz="1700" b="0">
+                <a:solidFill>
+                  <a:srgbClr val="222222"/>
+                </a:solidFill>
+                <a:latin typeface="맑은 고딕"/>
+              </a:rPr>
+              <a:t> (두 노드, 실행 중 상태)</a:t>
             </a:r>
           </a:p>
           <a:p>
@@ -6782,7 +7072,26 @@
                 </a:solidFill>
                 <a:latin typeface="맑은 고딕"/>
               </a:rPr>
-              <a:t>•  기존 `adg-configured` 는 5장 시점 — 되돌리면 6장부터 다시</a:t>
+              <a:t>•  기존 </a:t>
+            </a:r>
+            <a:r>
+              <a:rPr sz="1700" b="0">
+                <a:solidFill>
+                  <a:srgbClr val="222222"/>
+                </a:solidFill>
+                <a:latin typeface="Consolas"/>
+                <a:cs typeface="Consolas"/>
+              </a:rPr>
+              <a:t>adg-configured</a:t>
+            </a:r>
+            <a:r>
+              <a:rPr sz="1700" b="0">
+                <a:solidFill>
+                  <a:srgbClr val="222222"/>
+                </a:solidFill>
+                <a:latin typeface="맑은 고딕"/>
+              </a:rPr>
+              <a:t> 는 5장 시점 — 되돌리면 6장부터 다시</a:t>
             </a:r>
           </a:p>
           <a:p>
@@ -6798,7 +7107,16 @@
                 </a:solidFill>
                 <a:latin typeface="맑은 고딕"/>
               </a:rPr>
-              <a:t>•  **되돌아갈 지점은 "가장 가까운 정상 상태"여야 쓸모가 있다**</a:t>
+              <a:t>•  </a:t>
+            </a:r>
+            <a:r>
+              <a:rPr sz="1700" b="1">
+                <a:solidFill>
+                  <a:srgbClr val="222222"/>
+                </a:solidFill>
+                <a:latin typeface="맑은 고딕"/>
+              </a:rPr>
+              <a:t>되돌아갈 지점은 "가장 가까운 정상 상태"여야 쓸모가 있다</a:t>
             </a:r>
           </a:p>
           <a:p>
@@ -7248,7 +7566,26 @@
                 </a:solidFill>
                 <a:latin typeface="맑은 고딕"/>
               </a:rPr>
-              <a:t>•  `EXEC dbms_logstdby.build;` — 한 줄</a:t>
+              <a:t>•  </a:t>
+            </a:r>
+            <a:r>
+              <a:rPr sz="1700" b="0">
+                <a:solidFill>
+                  <a:srgbClr val="222222"/>
+                </a:solidFill>
+                <a:latin typeface="Consolas"/>
+                <a:cs typeface="Consolas"/>
+              </a:rPr>
+              <a:t>EXEC dbms_logstdby.build;</a:t>
+            </a:r>
+            <a:r>
+              <a:rPr sz="1700" b="0">
+                <a:solidFill>
+                  <a:srgbClr val="222222"/>
+                </a:solidFill>
+                <a:latin typeface="맑은 고딕"/>
+              </a:rPr>
+              <a:t> — 한 줄</a:t>
             </a:r>
           </a:p>
           <a:p>
@@ -7264,7 +7601,17 @@
                 </a:solidFill>
                 <a:latin typeface="맑은 고딕"/>
               </a:rPr>
-              <a:t>•  실행 전 — `MN=NO  PK=NO  UI=NO`</a:t>
+              <a:t>•  실행 전 — </a:t>
+            </a:r>
+            <a:r>
+              <a:rPr sz="1700" b="0">
+                <a:solidFill>
+                  <a:srgbClr val="222222"/>
+                </a:solidFill>
+                <a:latin typeface="Consolas"/>
+                <a:cs typeface="Consolas"/>
+              </a:rPr>
+              <a:t>MN=NO  PK=NO  UI=NO</a:t>
             </a:r>
           </a:p>
           <a:p>
@@ -7280,7 +7627,17 @@
                 </a:solidFill>
                 <a:latin typeface="맑은 고딕"/>
               </a:rPr>
-              <a:t>•  실행 후 — **`MN=IMPLICIT  PK=YES  UI=YES`**</a:t>
+              <a:t>•  실행 후 — </a:t>
+            </a:r>
+            <a:r>
+              <a:rPr sz="1700" b="1">
+                <a:solidFill>
+                  <a:srgbClr val="222222"/>
+                </a:solidFill>
+                <a:latin typeface="Consolas"/>
+                <a:cs typeface="Consolas"/>
+              </a:rPr>
+              <a:t>MN=IMPLICIT  PK=YES  UI=YES</a:t>
             </a:r>
           </a:p>
           <a:p>
@@ -7296,7 +7653,26 @@
                 </a:solidFill>
                 <a:latin typeface="맑은 고딕"/>
               </a:rPr>
-              <a:t>•  `IMPLICIT` = 직접 켜지 않았지만 켜진 것과 같은 상태</a:t>
+              <a:t>•  </a:t>
+            </a:r>
+            <a:r>
+              <a:rPr sz="1700" b="0">
+                <a:solidFill>
+                  <a:srgbClr val="222222"/>
+                </a:solidFill>
+                <a:latin typeface="Consolas"/>
+                <a:cs typeface="Consolas"/>
+              </a:rPr>
+              <a:t>IMPLICIT</a:t>
+            </a:r>
+            <a:r>
+              <a:rPr sz="1700" b="0">
+                <a:solidFill>
+                  <a:srgbClr val="222222"/>
+                </a:solidFill>
+                <a:latin typeface="맑은 고딕"/>
+              </a:rPr>
+              <a:t> = 직접 켜지 않았지만 켜진 것과 같은 상태</a:t>
             </a:r>
           </a:p>
           <a:p>
@@ -7312,7 +7688,64 @@
                 </a:solidFill>
                 <a:latin typeface="맑은 고딕"/>
               </a:rPr>
-              <a:t>•  `V$ARCHIVED_LOG` 의 `DICTIONARY_BEGIN`·`DICTIONARY_END` 로 확인</a:t>
+              <a:t>•  </a:t>
+            </a:r>
+            <a:r>
+              <a:rPr sz="1700" b="0">
+                <a:solidFill>
+                  <a:srgbClr val="222222"/>
+                </a:solidFill>
+                <a:latin typeface="Consolas"/>
+                <a:cs typeface="Consolas"/>
+              </a:rPr>
+              <a:t>V$ARCHIVED_LOG</a:t>
+            </a:r>
+            <a:r>
+              <a:rPr sz="1700" b="0">
+                <a:solidFill>
+                  <a:srgbClr val="222222"/>
+                </a:solidFill>
+                <a:latin typeface="맑은 고딕"/>
+              </a:rPr>
+              <a:t> 의 </a:t>
+            </a:r>
+            <a:r>
+              <a:rPr sz="1700" b="0">
+                <a:solidFill>
+                  <a:srgbClr val="222222"/>
+                </a:solidFill>
+                <a:latin typeface="Consolas"/>
+                <a:cs typeface="Consolas"/>
+              </a:rPr>
+              <a:t>DICTIONARY_BEGIN</a:t>
+            </a:r>
+            <a:r>
+              <a:rPr sz="1700" b="0">
+                <a:solidFill>
+                  <a:srgbClr val="222222"/>
+                </a:solidFill>
+                <a:latin typeface="맑은 고딕"/>
+              </a:rPr>
+              <a:t>·</a:t>
+            </a:r>
+            <a:r>
+              <a:rPr sz="1700" b="0">
+                <a:solidFill>
+                  <a:srgbClr val="222222"/>
+                </a:solidFill>
+                <a:latin typeface="Consolas"/>
+                <a:cs typeface="Consolas"/>
+              </a:rPr>
+              <a:t>DICTIONARY_END</a:t>
+            </a:r>
+            <a:r>
+              <a:rPr sz="1700" b="0">
+                <a:solidFill>
+                  <a:srgbClr val="222222"/>
+                </a:solidFill>
+                <a:latin typeface="맑은 고딕"/>
+              </a:rPr>
+              <a:t> 로 확인</a:t>
             </a:r>
           </a:p>
         </p:txBody>
@@ -7507,7 +7940,16 @@
                 </a:solidFill>
                 <a:latin typeface="맑은 고딕"/>
               </a:rPr>
-              <a:t>•  Primary 가 **리두에 통째로 실어 보낸다**</a:t>
+              <a:t>•  Primary 가 </a:t>
+            </a:r>
+            <a:r>
+              <a:rPr sz="1700" b="1">
+                <a:solidFill>
+                  <a:srgbClr val="222222"/>
+                </a:solidFill>
+                <a:latin typeface="맑은 고딕"/>
+              </a:rPr>
+              <a:t>리두에 통째로 실어 보낸다</a:t>
             </a:r>
           </a:p>
           <a:p>
@@ -7523,7 +7965,25 @@
                 </a:solidFill>
                 <a:latin typeface="맑은 고딕"/>
               </a:rPr>
-              <a:t>•  전환 명령은 시작 지점부터 **앞으로** 나아가며 찾는다</a:t>
+              <a:t>•  전환 명령은 시작 지점부터 </a:t>
+            </a:r>
+            <a:r>
+              <a:rPr sz="1700" b="1">
+                <a:solidFill>
+                  <a:srgbClr val="222222"/>
+                </a:solidFill>
+                <a:latin typeface="맑은 고딕"/>
+              </a:rPr>
+              <a:t>앞으로</a:t>
+            </a:r>
+            <a:r>
+              <a:rPr sz="1700" b="0">
+                <a:solidFill>
+                  <a:srgbClr val="222222"/>
+                </a:solidFill>
+                <a:latin typeface="맑은 고딕"/>
+              </a:rPr>
+              <a:t> 나아가며 찾는다</a:t>
             </a:r>
           </a:p>
           <a:p>
@@ -7539,7 +7999,16 @@
                 </a:solidFill>
                 <a:latin typeface="맑은 고딕"/>
               </a:rPr>
-              <a:t>•  **이미 지나쳤으면 영원히 못 찾는다**</a:t>
+              <a:t>•  </a:t>
+            </a:r>
+            <a:r>
+              <a:rPr sz="1700" b="1">
+                <a:solidFill>
+                  <a:srgbClr val="222222"/>
+                </a:solidFill>
+                <a:latin typeface="맑은 고딕"/>
+              </a:rPr>
+              <a:t>이미 지나쳤으면 영원히 못 찾는다</a:t>
             </a:r>
           </a:p>
         </p:txBody>
@@ -7718,7 +8187,26 @@
                 </a:solidFill>
                 <a:latin typeface="맑은 고딕"/>
               </a:rPr>
-              <a:t>•  `alter database recover to logical standby keep identity;` → 응답 없음</a:t>
+              <a:t>•  </a:t>
+            </a:r>
+            <a:r>
+              <a:rPr sz="1700" b="0">
+                <a:solidFill>
+                  <a:srgbClr val="222222"/>
+                </a:solidFill>
+                <a:latin typeface="Consolas"/>
+                <a:cs typeface="Consolas"/>
+              </a:rPr>
+              <a:t>alter database recover to logical standby keep identity;</a:t>
+            </a:r>
+            <a:r>
+              <a:rPr sz="1700" b="0">
+                <a:solidFill>
+                  <a:srgbClr val="222222"/>
+                </a:solidFill>
+                <a:latin typeface="맑은 고딕"/>
+              </a:rPr>
+              <a:t> → 응답 없음</a:t>
             </a:r>
           </a:p>
           <a:p>
@@ -7734,7 +8222,17 @@
                 </a:solidFill>
                 <a:latin typeface="맑은 고딕"/>
               </a:rPr>
-              <a:t>•  알림 로그 — `Media Recovery Waiting for T-1.S-47 (in transit)`</a:t>
+              <a:t>•  알림 로그 — </a:t>
+            </a:r>
+            <a:r>
+              <a:rPr sz="1700" b="0">
+                <a:solidFill>
+                  <a:srgbClr val="222222"/>
+                </a:solidFill>
+                <a:latin typeface="Consolas"/>
+                <a:cs typeface="Consolas"/>
+              </a:rPr>
+              <a:t>Media Recovery Waiting for T-1.S-47 (in transit)</a:t>
             </a:r>
           </a:p>
           <a:p>
@@ -7750,7 +8248,25 @@
                 </a:solidFill>
                 <a:latin typeface="맑은 고딕"/>
               </a:rPr>
-              <a:t>•  Primary 최대 시퀀스는 **46** — 아직 없는 리두를 기다린다</a:t>
+              <a:t>•  Primary 최대 시퀀스는 </a:t>
+            </a:r>
+            <a:r>
+              <a:rPr sz="1700" b="1">
+                <a:solidFill>
+                  <a:srgbClr val="222222"/>
+                </a:solidFill>
+                <a:latin typeface="맑은 고딕"/>
+              </a:rPr>
+              <a:t>46</a:t>
+            </a:r>
+            <a:r>
+              <a:rPr sz="1700" b="0">
+                <a:solidFill>
+                  <a:srgbClr val="222222"/>
+                </a:solidFill>
+                <a:latin typeface="맑은 고딕"/>
+              </a:rPr>
+              <a:t> — 아직 없는 리두를 기다린다</a:t>
             </a:r>
           </a:p>
           <a:p>
@@ -7766,7 +8282,16 @@
                 </a:solidFill>
                 <a:latin typeface="맑은 고딕"/>
               </a:rPr>
-              <a:t>•  근본 원인 — MRP 가 **딕셔너리를 지나쳤다**</a:t>
+              <a:t>•  근본 원인 — MRP 가 </a:t>
+            </a:r>
+            <a:r>
+              <a:rPr sz="1700" b="1">
+                <a:solidFill>
+                  <a:srgbClr val="222222"/>
+                </a:solidFill>
+                <a:latin typeface="맑은 고딕"/>
+              </a:rPr>
+              <a:t>딕셔너리를 지나쳤다</a:t>
             </a:r>
           </a:p>
           <a:p>
@@ -7782,7 +8307,26 @@
                 </a:solidFill>
                 <a:latin typeface="맑은 고딕"/>
               </a:rPr>
-              <a:t>•  조치 — 로그 전환 + **`BUILD` 를 다시 실행**</a:t>
+              <a:t>•  조치 — 로그 전환 + </a:t>
+            </a:r>
+            <a:r>
+              <a:rPr sz="1700" b="1">
+                <a:solidFill>
+                  <a:srgbClr val="222222"/>
+                </a:solidFill>
+                <a:latin typeface="Consolas"/>
+                <a:cs typeface="Consolas"/>
+              </a:rPr>
+              <a:t>BUILD</a:t>
+            </a:r>
+            <a:r>
+              <a:rPr sz="1700" b="1">
+                <a:solidFill>
+                  <a:srgbClr val="222222"/>
+                </a:solidFill>
+                <a:latin typeface="맑은 고딕"/>
+              </a:rPr>
+              <a:t> 를 다시 실행</a:t>
             </a:r>
           </a:p>
         </p:txBody>
@@ -7961,7 +8505,44 @@
                 </a:solidFill>
                 <a:latin typeface="맑은 고딕"/>
               </a:rPr>
-              <a:t>•  `... TO LOGICAL STANDBY boston_lg` → **ORA-02084** (9자)</a:t>
+              <a:t>•  </a:t>
+            </a:r>
+            <a:r>
+              <a:rPr sz="1700" b="0">
+                <a:solidFill>
+                  <a:srgbClr val="222222"/>
+                </a:solidFill>
+                <a:latin typeface="Consolas"/>
+                <a:cs typeface="Consolas"/>
+              </a:rPr>
+              <a:t>... TO LOGICAL STANDBY boston_lg</a:t>
+            </a:r>
+            <a:r>
+              <a:rPr sz="1700" b="0">
+                <a:solidFill>
+                  <a:srgbClr val="222222"/>
+                </a:solidFill>
+                <a:latin typeface="맑은 고딕"/>
+              </a:rPr>
+              <a:t> → </a:t>
+            </a:r>
+            <a:r>
+              <a:rPr sz="1700" b="1">
+                <a:solidFill>
+                  <a:srgbClr val="222222"/>
+                </a:solidFill>
+                <a:latin typeface="맑은 고딕"/>
+              </a:rPr>
+              <a:t>ORA-02084</a:t>
+            </a:r>
+            <a:r>
+              <a:rPr sz="1700" b="0">
+                <a:solidFill>
+                  <a:srgbClr val="222222"/>
+                </a:solidFill>
+                <a:latin typeface="맑은 고딕"/>
+              </a:rPr>
+              <a:t> (9자)</a:t>
             </a:r>
           </a:p>
           <a:p>
@@ -7977,7 +8558,35 @@
                 </a:solidFill>
                 <a:latin typeface="맑은 고딕"/>
               </a:rPr>
-              <a:t>•  `DB_NAME` 은 **8자 이하**</a:t>
+              <a:t>•  </a:t>
+            </a:r>
+            <a:r>
+              <a:rPr sz="1700" b="0">
+                <a:solidFill>
+                  <a:srgbClr val="222222"/>
+                </a:solidFill>
+                <a:latin typeface="Consolas"/>
+                <a:cs typeface="Consolas"/>
+              </a:rPr>
+              <a:t>DB_NAME</a:t>
+            </a:r>
+            <a:r>
+              <a:rPr sz="1700" b="0">
+                <a:solidFill>
+                  <a:srgbClr val="222222"/>
+                </a:solidFill>
+                <a:latin typeface="맑은 고딕"/>
+              </a:rPr>
+              <a:t> 은 </a:t>
+            </a:r>
+            <a:r>
+              <a:rPr sz="1700" b="1">
+                <a:solidFill>
+                  <a:srgbClr val="222222"/>
+                </a:solidFill>
+                <a:latin typeface="맑은 고딕"/>
+              </a:rPr>
+              <a:t>8자 이하</a:t>
             </a:r>
           </a:p>
           <a:p>
@@ -7993,7 +8602,35 @@
                 </a:solidFill>
                 <a:latin typeface="맑은 고딕"/>
               </a:rPr>
-              <a:t>•  **`KEEP IDENTITY`** — DB_NAME·DBID 유지. **역할 전환 가능**</a:t>
+              <a:t>•  </a:t>
+            </a:r>
+            <a:r>
+              <a:rPr sz="1700" b="1">
+                <a:solidFill>
+                  <a:srgbClr val="222222"/>
+                </a:solidFill>
+                <a:latin typeface="Consolas"/>
+                <a:cs typeface="Consolas"/>
+              </a:rPr>
+              <a:t>KEEP IDENTITY</a:t>
+            </a:r>
+            <a:r>
+              <a:rPr sz="1700" b="0">
+                <a:solidFill>
+                  <a:srgbClr val="222222"/>
+                </a:solidFill>
+                <a:latin typeface="맑은 고딕"/>
+              </a:rPr>
+              <a:t> — DB_NAME·DBID 유지. </a:t>
+            </a:r>
+            <a:r>
+              <a:rPr sz="1700" b="1">
+                <a:solidFill>
+                  <a:srgbClr val="222222"/>
+                </a:solidFill>
+                <a:latin typeface="맑은 고딕"/>
+              </a:rPr>
+              <a:t>역할 전환 가능</a:t>
             </a:r>
           </a:p>
           <a:p>
@@ -8165,7 +8802,26 @@
                 </a:solidFill>
                 <a:latin typeface="맑은 고딕"/>
               </a:rPr>
-              <a:t>•  전환 전에 점검할 항목을 `DBA_LOGSTDBY_*` 뷰로 확인한다.</a:t>
+              <a:t>•  전환 전에 점검할 항목을 </a:t>
+            </a:r>
+            <a:r>
+              <a:rPr sz="1600" b="0">
+                <a:solidFill>
+                  <a:srgbClr val="222222"/>
+                </a:solidFill>
+                <a:latin typeface="Consolas"/>
+                <a:cs typeface="Consolas"/>
+              </a:rPr>
+              <a:t>DBA_LOGSTDBY_*</a:t>
+            </a:r>
+            <a:r>
+              <a:rPr sz="1600" b="0">
+                <a:solidFill>
+                  <a:srgbClr val="222222"/>
+                </a:solidFill>
+                <a:latin typeface="맑은 고딕"/>
+              </a:rPr>
+              <a:t> 뷰로 확인한다.</a:t>
             </a:r>
           </a:p>
           <a:p>
@@ -8181,7 +8837,26 @@
                 </a:solidFill>
                 <a:latin typeface="맑은 고딕"/>
               </a:rPr>
-              <a:t>•  `DBMS_LOGSTDBY.BUILD` 의 부수 효과와 딕셔너리 전달 구조를 이해한다.</a:t>
+              <a:t>•  </a:t>
+            </a:r>
+            <a:r>
+              <a:rPr sz="1600" b="0">
+                <a:solidFill>
+                  <a:srgbClr val="222222"/>
+                </a:solidFill>
+                <a:latin typeface="Consolas"/>
+                <a:cs typeface="Consolas"/>
+              </a:rPr>
+              <a:t>DBMS_LOGSTDBY.BUILD</a:t>
+            </a:r>
+            <a:r>
+              <a:rPr sz="1600" b="0">
+                <a:solidFill>
+                  <a:srgbClr val="222222"/>
+                </a:solidFill>
+                <a:latin typeface="맑은 고딕"/>
+              </a:rPr>
+              <a:t> 의 부수 효과와 딕셔너리 전달 구조를 이해한다.</a:t>
             </a:r>
           </a:p>
           <a:p>
@@ -8424,7 +9099,44 @@
                 </a:solidFill>
                 <a:latin typeface="맑은 고딕"/>
               </a:rPr>
-              <a:t>•  `DATABASE_ROLE` = **LOGICAL STANDBY** (다섯 번째 역할)</a:t>
+              <a:t>•  </a:t>
+            </a:r>
+            <a:r>
+              <a:rPr sz="1700" b="0">
+                <a:solidFill>
+                  <a:srgbClr val="222222"/>
+                </a:solidFill>
+                <a:latin typeface="Consolas"/>
+                <a:cs typeface="Consolas"/>
+              </a:rPr>
+              <a:t>DATABASE_ROLE</a:t>
+            </a:r>
+            <a:r>
+              <a:rPr sz="1700" b="0">
+                <a:solidFill>
+                  <a:srgbClr val="222222"/>
+                </a:solidFill>
+                <a:latin typeface="맑은 고딕"/>
+              </a:rPr>
+              <a:t> = </a:t>
+            </a:r>
+            <a:r>
+              <a:rPr sz="1700" b="1">
+                <a:solidFill>
+                  <a:srgbClr val="222222"/>
+                </a:solidFill>
+                <a:latin typeface="맑은 고딕"/>
+              </a:rPr>
+              <a:t>LOGICAL STANDBY</a:t>
+            </a:r>
+            <a:r>
+              <a:rPr sz="1700" b="0">
+                <a:solidFill>
+                  <a:srgbClr val="222222"/>
+                </a:solidFill>
+                <a:latin typeface="맑은 고딕"/>
+              </a:rPr>
+              <a:t> (다섯 번째 역할)</a:t>
             </a:r>
           </a:p>
           <a:p>
@@ -8440,7 +9152,35 @@
                 </a:solidFill>
                 <a:latin typeface="맑은 고딕"/>
               </a:rPr>
-              <a:t>•  `CONTROLFILE_TYPE` = **CURRENT**</a:t>
+              <a:t>•  </a:t>
+            </a:r>
+            <a:r>
+              <a:rPr sz="1700" b="0">
+                <a:solidFill>
+                  <a:srgbClr val="222222"/>
+                </a:solidFill>
+                <a:latin typeface="Consolas"/>
+                <a:cs typeface="Consolas"/>
+              </a:rPr>
+              <a:t>CONTROLFILE_TYPE</a:t>
+            </a:r>
+            <a:r>
+              <a:rPr sz="1700" b="0">
+                <a:solidFill>
+                  <a:srgbClr val="222222"/>
+                </a:solidFill>
+                <a:latin typeface="맑은 고딕"/>
+              </a:rPr>
+              <a:t> = </a:t>
+            </a:r>
+            <a:r>
+              <a:rPr sz="1700" b="1">
+                <a:solidFill>
+                  <a:srgbClr val="222222"/>
+                </a:solidFill>
+                <a:latin typeface="맑은 고딕"/>
+              </a:rPr>
+              <a:t>CURRENT</a:t>
             </a:r>
           </a:p>
           <a:p>
@@ -8456,7 +9196,44 @@
                 </a:solidFill>
                 <a:latin typeface="맑은 고딕"/>
               </a:rPr>
-              <a:t>•  `CDB` = **YES** — Multitenant 에서도 된다</a:t>
+              <a:t>•  </a:t>
+            </a:r>
+            <a:r>
+              <a:rPr sz="1700" b="0">
+                <a:solidFill>
+                  <a:srgbClr val="222222"/>
+                </a:solidFill>
+                <a:latin typeface="Consolas"/>
+                <a:cs typeface="Consolas"/>
+              </a:rPr>
+              <a:t>CDB</a:t>
+            </a:r>
+            <a:r>
+              <a:rPr sz="1700" b="0">
+                <a:solidFill>
+                  <a:srgbClr val="222222"/>
+                </a:solidFill>
+                <a:latin typeface="맑은 고딕"/>
+              </a:rPr>
+              <a:t> = </a:t>
+            </a:r>
+            <a:r>
+              <a:rPr sz="1700" b="1">
+                <a:solidFill>
+                  <a:srgbClr val="222222"/>
+                </a:solidFill>
+                <a:latin typeface="맑은 고딕"/>
+              </a:rPr>
+              <a:t>YES</a:t>
+            </a:r>
+            <a:r>
+              <a:rPr sz="1700" b="0">
+                <a:solidFill>
+                  <a:srgbClr val="222222"/>
+                </a:solidFill>
+                <a:latin typeface="맑은 고딕"/>
+              </a:rPr>
+              <a:t> — Multitenant 에서도 된다</a:t>
             </a:r>
           </a:p>
           <a:p>
@@ -8472,7 +9249,44 @@
                 </a:solidFill>
                 <a:latin typeface="맑은 고딕"/>
               </a:rPr>
-              <a:t>•  `GUARD_STATUS` = **ALL** — 자동으로 켜졌다</a:t>
+              <a:t>•  </a:t>
+            </a:r>
+            <a:r>
+              <a:rPr sz="1700" b="0">
+                <a:solidFill>
+                  <a:srgbClr val="222222"/>
+                </a:solidFill>
+                <a:latin typeface="Consolas"/>
+                <a:cs typeface="Consolas"/>
+              </a:rPr>
+              <a:t>GUARD_STATUS</a:t>
+            </a:r>
+            <a:r>
+              <a:rPr sz="1700" b="0">
+                <a:solidFill>
+                  <a:srgbClr val="222222"/>
+                </a:solidFill>
+                <a:latin typeface="맑은 고딕"/>
+              </a:rPr>
+              <a:t> = </a:t>
+            </a:r>
+            <a:r>
+              <a:rPr sz="1700" b="1">
+                <a:solidFill>
+                  <a:srgbClr val="222222"/>
+                </a:solidFill>
+                <a:latin typeface="맑은 고딕"/>
+              </a:rPr>
+              <a:t>ALL</a:t>
+            </a:r>
+            <a:r>
+              <a:rPr sz="1700" b="0">
+                <a:solidFill>
+                  <a:srgbClr val="222222"/>
+                </a:solidFill>
+                <a:latin typeface="맑은 고딕"/>
+              </a:rPr>
+              <a:t> — 자동으로 켜졌다</a:t>
             </a:r>
           </a:p>
           <a:p>
@@ -8488,7 +9302,26 @@
                 </a:solidFill>
                 <a:latin typeface="맑은 고딕"/>
               </a:rPr>
-              <a:t>•  `OPEN_MODE` = MOUNTED</a:t>
+              <a:t>•  </a:t>
+            </a:r>
+            <a:r>
+              <a:rPr sz="1700" b="0">
+                <a:solidFill>
+                  <a:srgbClr val="222222"/>
+                </a:solidFill>
+                <a:latin typeface="Consolas"/>
+                <a:cs typeface="Consolas"/>
+              </a:rPr>
+              <a:t>OPEN_MODE</a:t>
+            </a:r>
+            <a:r>
+              <a:rPr sz="1700" b="0">
+                <a:solidFill>
+                  <a:srgbClr val="222222"/>
+                </a:solidFill>
+                <a:latin typeface="맑은 고딕"/>
+              </a:rPr>
+              <a:t> = MOUNTED</a:t>
             </a:r>
           </a:p>
         </p:txBody>
@@ -8667,7 +9500,16 @@
                 </a:solidFill>
                 <a:latin typeface="맑은 고딕"/>
               </a:rPr>
-              <a:t>•  Logical Standby 에서 MRP 기동 → **ORA-01665**</a:t>
+              <a:t>•  Logical Standby 에서 MRP 기동 → </a:t>
+            </a:r>
+            <a:r>
+              <a:rPr sz="1700" b="1">
+                <a:solidFill>
+                  <a:srgbClr val="222222"/>
+                </a:solidFill>
+                <a:latin typeface="맑은 고딕"/>
+              </a:rPr>
+              <a:t>ORA-01665</a:t>
             </a:r>
           </a:p>
           <a:p>
@@ -8699,7 +9541,16 @@
                 </a:solidFill>
                 <a:latin typeface="맑은 고딕"/>
               </a:rPr>
-              <a:t>•  11장 Snapshot(CURRENT) / **12장 Logical(CURRENT)**</a:t>
+              <a:t>•  11장 Snapshot(CURRENT) / </a:t>
+            </a:r>
+            <a:r>
+              <a:rPr sz="1700" b="1">
+                <a:solidFill>
+                  <a:srgbClr val="222222"/>
+                </a:solidFill>
+                <a:latin typeface="맑은 고딕"/>
+              </a:rPr>
+              <a:t>12장 Logical(CURRENT)</a:t>
             </a:r>
           </a:p>
           <a:p>
@@ -8715,7 +9566,17 @@
                 </a:solidFill>
                 <a:latin typeface="맑은 고딕"/>
               </a:rPr>
-              <a:t>•  Physical Standby 만 `CONTROLFILE_TYPE = STANDBY`</a:t>
+              <a:t>•  Physical Standby 만 </a:t>
+            </a:r>
+            <a:r>
+              <a:rPr sz="1700" b="0">
+                <a:solidFill>
+                  <a:srgbClr val="222222"/>
+                </a:solidFill>
+                <a:latin typeface="Consolas"/>
+                <a:cs typeface="Consolas"/>
+              </a:rPr>
+              <a:t>CONTROLFILE_TYPE = STANDBY</a:t>
             </a:r>
           </a:p>
           <a:p>
@@ -8731,7 +9592,16 @@
                 </a:solidFill>
                 <a:latin typeface="맑은 고딕"/>
               </a:rPr>
-              <a:t>•  **MRP 를 띄울 수 있는 것은 Standby 컨트롤 파일뿐**</a:t>
+              <a:t>•  </a:t>
+            </a:r>
+            <a:r>
+              <a:rPr sz="1700" b="1">
+                <a:solidFill>
+                  <a:srgbClr val="222222"/>
+                </a:solidFill>
+                <a:latin typeface="맑은 고딕"/>
+              </a:rPr>
+              <a:t>MRP 를 띄울 수 있는 것은 Standby 컨트롤 파일뿐</a:t>
             </a:r>
           </a:p>
         </p:txBody>
@@ -9165,7 +10035,44 @@
                 </a:solidFill>
                 <a:latin typeface="맑은 고딕"/>
               </a:rPr>
-              <a:t>•  `ALTER DATABASE OPEN` → **READ WRITE** (READ ONLY 가 아니다)</a:t>
+              <a:t>•  </a:t>
+            </a:r>
+            <a:r>
+              <a:rPr sz="1700" b="0">
+                <a:solidFill>
+                  <a:srgbClr val="222222"/>
+                </a:solidFill>
+                <a:latin typeface="Consolas"/>
+                <a:cs typeface="Consolas"/>
+              </a:rPr>
+              <a:t>ALTER DATABASE OPEN</a:t>
+            </a:r>
+            <a:r>
+              <a:rPr sz="1700" b="0">
+                <a:solidFill>
+                  <a:srgbClr val="222222"/>
+                </a:solidFill>
+                <a:latin typeface="맑은 고딕"/>
+              </a:rPr>
+              <a:t> → </a:t>
+            </a:r>
+            <a:r>
+              <a:rPr sz="1700" b="1">
+                <a:solidFill>
+                  <a:srgbClr val="222222"/>
+                </a:solidFill>
+                <a:latin typeface="맑은 고딕"/>
+              </a:rPr>
+              <a:t>READ WRITE</a:t>
+            </a:r>
+            <a:r>
+              <a:rPr sz="1700" b="0">
+                <a:solidFill>
+                  <a:srgbClr val="222222"/>
+                </a:solidFill>
+                <a:latin typeface="맑은 고딕"/>
+              </a:rPr>
+              <a:t> (READ ONLY 가 아니다)</a:t>
             </a:r>
           </a:p>
           <a:p>
@@ -9197,7 +10104,16 @@
                 </a:solidFill>
                 <a:latin typeface="맑은 고딕"/>
               </a:rPr>
-              <a:t>•  Snapshot — 잠시 빌려 쓰는 상태 / Logical — **평상시 상태**</a:t>
+              <a:t>•  Snapshot — 잠시 빌려 쓰는 상태 / Logical — </a:t>
+            </a:r>
+            <a:r>
+              <a:rPr sz="1700" b="1">
+                <a:solidFill>
+                  <a:srgbClr val="222222"/>
+                </a:solidFill>
+                <a:latin typeface="맑은 고딕"/>
+              </a:rPr>
+              <a:t>평상시 상태</a:t>
             </a:r>
           </a:p>
           <a:p>
@@ -9392,7 +10308,43 @@
                 </a:solidFill>
                 <a:latin typeface="맑은 고딕"/>
               </a:rPr>
-              <a:t>•  **READER** 리두를 읽는다 → **PREPARER** LCR 로 변환</a:t>
+              <a:t>•  </a:t>
+            </a:r>
+            <a:r>
+              <a:rPr sz="1700" b="1">
+                <a:solidFill>
+                  <a:srgbClr val="222222"/>
+                </a:solidFill>
+                <a:latin typeface="맑은 고딕"/>
+              </a:rPr>
+              <a:t>READER</a:t>
+            </a:r>
+            <a:r>
+              <a:rPr sz="1700" b="0">
+                <a:solidFill>
+                  <a:srgbClr val="222222"/>
+                </a:solidFill>
+                <a:latin typeface="맑은 고딕"/>
+              </a:rPr>
+              <a:t> 리두를 읽는다 → </a:t>
+            </a:r>
+            <a:r>
+              <a:rPr sz="1700" b="1">
+                <a:solidFill>
+                  <a:srgbClr val="222222"/>
+                </a:solidFill>
+                <a:latin typeface="맑은 고딕"/>
+              </a:rPr>
+              <a:t>PREPARER</a:t>
+            </a:r>
+            <a:r>
+              <a:rPr sz="1700" b="0">
+                <a:solidFill>
+                  <a:srgbClr val="222222"/>
+                </a:solidFill>
+                <a:latin typeface="맑은 고딕"/>
+              </a:rPr>
+              <a:t> LCR 로 변환</a:t>
             </a:r>
           </a:p>
           <a:p>
@@ -9408,7 +10360,43 @@
                 </a:solidFill>
                 <a:latin typeface="맑은 고딕"/>
               </a:rPr>
-              <a:t>•  **BUILDER** 트랜잭션으로 묶는다 → **ANALYZER** 의존 관계 계산</a:t>
+              <a:t>•  </a:t>
+            </a:r>
+            <a:r>
+              <a:rPr sz="1700" b="1">
+                <a:solidFill>
+                  <a:srgbClr val="222222"/>
+                </a:solidFill>
+                <a:latin typeface="맑은 고딕"/>
+              </a:rPr>
+              <a:t>BUILDER</a:t>
+            </a:r>
+            <a:r>
+              <a:rPr sz="1700" b="0">
+                <a:solidFill>
+                  <a:srgbClr val="222222"/>
+                </a:solidFill>
+                <a:latin typeface="맑은 고딕"/>
+              </a:rPr>
+              <a:t> 트랜잭션으로 묶는다 → </a:t>
+            </a:r>
+            <a:r>
+              <a:rPr sz="1700" b="1">
+                <a:solidFill>
+                  <a:srgbClr val="222222"/>
+                </a:solidFill>
+                <a:latin typeface="맑은 고딕"/>
+              </a:rPr>
+              <a:t>ANALYZER</a:t>
+            </a:r>
+            <a:r>
+              <a:rPr sz="1700" b="0">
+                <a:solidFill>
+                  <a:srgbClr val="222222"/>
+                </a:solidFill>
+                <a:latin typeface="맑은 고딕"/>
+              </a:rPr>
+              <a:t> 의존 관계 계산</a:t>
             </a:r>
           </a:p>
           <a:p>
@@ -9424,7 +10412,43 @@
                 </a:solidFill>
                 <a:latin typeface="맑은 고딕"/>
               </a:rPr>
-              <a:t>•  **COORDINATOR** 순서 배분 → **APPLIER** SQL 실행 (실습 5개)</a:t>
+              <a:t>•  </a:t>
+            </a:r>
+            <a:r>
+              <a:rPr sz="1700" b="1">
+                <a:solidFill>
+                  <a:srgbClr val="222222"/>
+                </a:solidFill>
+                <a:latin typeface="맑은 고딕"/>
+              </a:rPr>
+              <a:t>COORDINATOR</a:t>
+            </a:r>
+            <a:r>
+              <a:rPr sz="1700" b="0">
+                <a:solidFill>
+                  <a:srgbClr val="222222"/>
+                </a:solidFill>
+                <a:latin typeface="맑은 고딕"/>
+              </a:rPr>
+              <a:t> 순서 배분 → </a:t>
+            </a:r>
+            <a:r>
+              <a:rPr sz="1700" b="1">
+                <a:solidFill>
+                  <a:srgbClr val="222222"/>
+                </a:solidFill>
+                <a:latin typeface="맑은 고딕"/>
+              </a:rPr>
+              <a:t>APPLIER</a:t>
+            </a:r>
+            <a:r>
+              <a:rPr sz="1700" b="0">
+                <a:solidFill>
+                  <a:srgbClr val="222222"/>
+                </a:solidFill>
+                <a:latin typeface="맑은 고딕"/>
+              </a:rPr>
+              <a:t> SQL 실행 (실습 5개)</a:t>
             </a:r>
           </a:p>
           <a:p>
@@ -9619,7 +10643,35 @@
                 </a:solidFill>
                 <a:latin typeface="맑은 고딕"/>
               </a:rPr>
-              <a:t>•  `ORA-16111` 준비 중 (기동 직후) — **정상**</a:t>
+              <a:t>•  </a:t>
+            </a:r>
+            <a:r>
+              <a:rPr sz="1700" b="0">
+                <a:solidFill>
+                  <a:srgbClr val="222222"/>
+                </a:solidFill>
+                <a:latin typeface="Consolas"/>
+                <a:cs typeface="Consolas"/>
+              </a:rPr>
+              <a:t>ORA-16111</a:t>
+            </a:r>
+            <a:r>
+              <a:rPr sz="1700" b="0">
+                <a:solidFill>
+                  <a:srgbClr val="222222"/>
+                </a:solidFill>
+                <a:latin typeface="맑은 고딕"/>
+              </a:rPr>
+              <a:t> 준비 중 (기동 직후) — </a:t>
+            </a:r>
+            <a:r>
+              <a:rPr sz="1700" b="1">
+                <a:solidFill>
+                  <a:srgbClr val="222222"/>
+                </a:solidFill>
+                <a:latin typeface="맑은 고딕"/>
+              </a:rPr>
+              <a:t>정상</a:t>
             </a:r>
           </a:p>
           <a:p>
@@ -9635,7 +10687,35 @@
                 </a:solidFill>
                 <a:latin typeface="맑은 고딕"/>
               </a:rPr>
-              <a:t>•  `ORA-16116` 할 일이 없다 — **정상**</a:t>
+              <a:t>•  </a:t>
+            </a:r>
+            <a:r>
+              <a:rPr sz="1700" b="0">
+                <a:solidFill>
+                  <a:srgbClr val="222222"/>
+                </a:solidFill>
+                <a:latin typeface="Consolas"/>
+                <a:cs typeface="Consolas"/>
+              </a:rPr>
+              <a:t>ORA-16116</a:t>
+            </a:r>
+            <a:r>
+              <a:rPr sz="1700" b="0">
+                <a:solidFill>
+                  <a:srgbClr val="222222"/>
+                </a:solidFill>
+                <a:latin typeface="맑은 고딕"/>
+              </a:rPr>
+              <a:t> 할 일이 없다 — </a:t>
+            </a:r>
+            <a:r>
+              <a:rPr sz="1700" b="1">
+                <a:solidFill>
+                  <a:srgbClr val="222222"/>
+                </a:solidFill>
+                <a:latin typeface="맑은 고딕"/>
+              </a:rPr>
+              <a:t>정상</a:t>
             </a:r>
           </a:p>
           <a:p>
@@ -9651,7 +10731,35 @@
                 </a:solidFill>
                 <a:latin typeface="맑은 고딕"/>
               </a:rPr>
-              <a:t>•  `ORA-16242` 로그 파일 처리 중 — **정상**</a:t>
+              <a:t>•  </a:t>
+            </a:r>
+            <a:r>
+              <a:rPr sz="1700" b="0">
+                <a:solidFill>
+                  <a:srgbClr val="222222"/>
+                </a:solidFill>
+                <a:latin typeface="Consolas"/>
+                <a:cs typeface="Consolas"/>
+              </a:rPr>
+              <a:t>ORA-16242</a:t>
+            </a:r>
+            <a:r>
+              <a:rPr sz="1700" b="0">
+                <a:solidFill>
+                  <a:srgbClr val="222222"/>
+                </a:solidFill>
+                <a:latin typeface="맑은 고딕"/>
+              </a:rPr>
+              <a:t> 로그 파일 처리 중 — </a:t>
+            </a:r>
+            <a:r>
+              <a:rPr sz="1700" b="1">
+                <a:solidFill>
+                  <a:srgbClr val="222222"/>
+                </a:solidFill>
+                <a:latin typeface="맑은 고딕"/>
+              </a:rPr>
+              <a:t>정상</a:t>
             </a:r>
           </a:p>
           <a:p>
@@ -9667,7 +10775,45 @@
                 </a:solidFill>
                 <a:latin typeface="맑은 고딕"/>
               </a:rPr>
-              <a:t>•  `ORA-16128` 정상 종료 / `ORA-16222` 자동 재시도</a:t>
+              <a:t>•  </a:t>
+            </a:r>
+            <a:r>
+              <a:rPr sz="1700" b="0">
+                <a:solidFill>
+                  <a:srgbClr val="222222"/>
+                </a:solidFill>
+                <a:latin typeface="Consolas"/>
+                <a:cs typeface="Consolas"/>
+              </a:rPr>
+              <a:t>ORA-16128</a:t>
+            </a:r>
+            <a:r>
+              <a:rPr sz="1700" b="0">
+                <a:solidFill>
+                  <a:srgbClr val="222222"/>
+                </a:solidFill>
+                <a:latin typeface="맑은 고딕"/>
+              </a:rPr>
+              <a:t> 정상 종료 / </a:t>
+            </a:r>
+            <a:r>
+              <a:rPr sz="1700" b="0">
+                <a:solidFill>
+                  <a:srgbClr val="222222"/>
+                </a:solidFill>
+                <a:latin typeface="Consolas"/>
+                <a:cs typeface="Consolas"/>
+              </a:rPr>
+              <a:t>ORA-16222</a:t>
+            </a:r>
+            <a:r>
+              <a:rPr sz="1700" b="0">
+                <a:solidFill>
+                  <a:srgbClr val="222222"/>
+                </a:solidFill>
+                <a:latin typeface="맑은 고딕"/>
+              </a:rPr>
+              <a:t> 자동 재시도</a:t>
             </a:r>
           </a:p>
           <a:p>
@@ -9683,7 +10829,45 @@
                 </a:solidFill>
                 <a:latin typeface="맑은 고딕"/>
               </a:rPr>
-              <a:t>•  `STATE = IDLE` 은 "할 일 없음", **`SQL APPLY NOT ON` 이 "멈춤"**</a:t>
+              <a:t>•  </a:t>
+            </a:r>
+            <a:r>
+              <a:rPr sz="1700" b="0">
+                <a:solidFill>
+                  <a:srgbClr val="222222"/>
+                </a:solidFill>
+                <a:latin typeface="Consolas"/>
+                <a:cs typeface="Consolas"/>
+              </a:rPr>
+              <a:t>STATE = IDLE</a:t>
+            </a:r>
+            <a:r>
+              <a:rPr sz="1700" b="0">
+                <a:solidFill>
+                  <a:srgbClr val="222222"/>
+                </a:solidFill>
+                <a:latin typeface="맑은 고딕"/>
+              </a:rPr>
+              <a:t> 은 "할 일 없음", </a:t>
+            </a:r>
+            <a:r>
+              <a:rPr sz="1700" b="1">
+                <a:solidFill>
+                  <a:srgbClr val="222222"/>
+                </a:solidFill>
+                <a:latin typeface="Consolas"/>
+                <a:cs typeface="Consolas"/>
+              </a:rPr>
+              <a:t>SQL APPLY NOT ON</a:t>
+            </a:r>
+            <a:r>
+              <a:rPr sz="1700" b="1">
+                <a:solidFill>
+                  <a:srgbClr val="222222"/>
+                </a:solidFill>
+                <a:latin typeface="맑은 고딕"/>
+              </a:rPr>
+              <a:t> 이 "멈춤"</a:t>
             </a:r>
           </a:p>
         </p:txBody>
@@ -9862,7 +11046,45 @@
                 </a:solidFill>
                 <a:latin typeface="맑은 고딕"/>
               </a:rPr>
-              <a:t>•  PDB 에 `lgu` 사용자 + `lgu.t1` 생성 후 INSERT</a:t>
+              <a:t>•  PDB 에 </a:t>
+            </a:r>
+            <a:r>
+              <a:rPr sz="1700" b="0">
+                <a:solidFill>
+                  <a:srgbClr val="222222"/>
+                </a:solidFill>
+                <a:latin typeface="Consolas"/>
+                <a:cs typeface="Consolas"/>
+              </a:rPr>
+              <a:t>lgu</a:t>
+            </a:r>
+            <a:r>
+              <a:rPr sz="1700" b="0">
+                <a:solidFill>
+                  <a:srgbClr val="222222"/>
+                </a:solidFill>
+                <a:latin typeface="맑은 고딕"/>
+              </a:rPr>
+              <a:t> 사용자 + </a:t>
+            </a:r>
+            <a:r>
+              <a:rPr sz="1700" b="0">
+                <a:solidFill>
+                  <a:srgbClr val="222222"/>
+                </a:solidFill>
+                <a:latin typeface="Consolas"/>
+                <a:cs typeface="Consolas"/>
+              </a:rPr>
+              <a:t>lgu.t1</a:t>
+            </a:r>
+            <a:r>
+              <a:rPr sz="1700" b="0">
+                <a:solidFill>
+                  <a:srgbClr val="222222"/>
+                </a:solidFill>
+                <a:latin typeface="맑은 고딕"/>
+              </a:rPr>
+              <a:t> 생성 후 INSERT</a:t>
             </a:r>
           </a:p>
           <a:p>
@@ -9878,7 +11100,35 @@
                 </a:solidFill>
                 <a:latin typeface="맑은 고딕"/>
               </a:rPr>
-              <a:t>•  60초 뒤 Logical Standby 에서 → `1 replicated` **보인다**</a:t>
+              <a:t>•  60초 뒤 Logical Standby 에서 → </a:t>
+            </a:r>
+            <a:r>
+              <a:rPr sz="1700" b="0">
+                <a:solidFill>
+                  <a:srgbClr val="222222"/>
+                </a:solidFill>
+                <a:latin typeface="Consolas"/>
+                <a:cs typeface="Consolas"/>
+              </a:rPr>
+              <a:t>1 replicated</a:t>
+            </a:r>
+            <a:r>
+              <a:rPr sz="1700" b="0">
+                <a:solidFill>
+                  <a:srgbClr val="222222"/>
+                </a:solidFill>
+                <a:latin typeface="맑은 고딕"/>
+              </a:rPr>
+              <a:t> </a:t>
+            </a:r>
+            <a:r>
+              <a:rPr sz="1700" b="1">
+                <a:solidFill>
+                  <a:srgbClr val="222222"/>
+                </a:solidFill>
+                <a:latin typeface="맑은 고딕"/>
+              </a:rPr>
+              <a:t>보인다</a:t>
             </a:r>
           </a:p>
           <a:p>
@@ -9894,7 +11144,25 @@
                 </a:solidFill>
                 <a:latin typeface="맑은 고딕"/>
               </a:rPr>
-              <a:t>•  사용자 생성·권한·DDL·DML 이 **모두** 복제된다</a:t>
+              <a:t>•  사용자 생성·권한·DDL·DML 이 </a:t>
+            </a:r>
+            <a:r>
+              <a:rPr sz="1700" b="1">
+                <a:solidFill>
+                  <a:srgbClr val="222222"/>
+                </a:solidFill>
+                <a:latin typeface="맑은 고딕"/>
+              </a:rPr>
+              <a:t>모두</a:t>
+            </a:r>
+            <a:r>
+              <a:rPr sz="1700" b="0">
+                <a:solidFill>
+                  <a:srgbClr val="222222"/>
+                </a:solidFill>
+                <a:latin typeface="맑은 고딕"/>
+              </a:rPr>
+              <a:t> 복제된다</a:t>
             </a:r>
           </a:p>
           <a:p>
@@ -9910,7 +11178,35 @@
                 </a:solidFill>
                 <a:latin typeface="맑은 고딕"/>
               </a:rPr>
-              <a:t>•  `system.lg_skip` 은 → **ORA-00942**</a:t>
+              <a:t>•  </a:t>
+            </a:r>
+            <a:r>
+              <a:rPr sz="1700" b="0">
+                <a:solidFill>
+                  <a:srgbClr val="222222"/>
+                </a:solidFill>
+                <a:latin typeface="Consolas"/>
+                <a:cs typeface="Consolas"/>
+              </a:rPr>
+              <a:t>system.lg_skip</a:t>
+            </a:r>
+            <a:r>
+              <a:rPr sz="1700" b="0">
+                <a:solidFill>
+                  <a:srgbClr val="222222"/>
+                </a:solidFill>
+                <a:latin typeface="맑은 고딕"/>
+              </a:rPr>
+              <a:t> 은 → </a:t>
+            </a:r>
+            <a:r>
+              <a:rPr sz="1700" b="1">
+                <a:solidFill>
+                  <a:srgbClr val="222222"/>
+                </a:solidFill>
+                <a:latin typeface="맑은 고딕"/>
+              </a:rPr>
+              <a:t>ORA-00942</a:t>
             </a:r>
           </a:p>
         </p:txBody>
@@ -10328,7 +11624,26 @@
                 </a:solidFill>
                 <a:latin typeface="맑은 고딕"/>
               </a:rPr>
-              <a:t>•  `NONE` — LGU 허용 / RPT 허용 / SYS 허용</a:t>
+              <a:t>•  </a:t>
+            </a:r>
+            <a:r>
+              <a:rPr sz="1700" b="0">
+                <a:solidFill>
+                  <a:srgbClr val="222222"/>
+                </a:solidFill>
+                <a:latin typeface="Consolas"/>
+                <a:cs typeface="Consolas"/>
+              </a:rPr>
+              <a:t>NONE</a:t>
+            </a:r>
+            <a:r>
+              <a:rPr sz="1700" b="0">
+                <a:solidFill>
+                  <a:srgbClr val="222222"/>
+                </a:solidFill>
+                <a:latin typeface="맑은 고딕"/>
+              </a:rPr>
+              <a:t> — LGU 허용 / RPT 허용 / SYS 허용</a:t>
             </a:r>
           </a:p>
           <a:p>
@@ -10344,7 +11659,71 @@
                 </a:solidFill>
                 <a:latin typeface="맑은 고딕"/>
               </a:rPr>
-              <a:t>•  `STANDBY` — LGU **ORA-16224** / RPT **ORA-16224** / SYS **허용**</a:t>
+              <a:t>•  </a:t>
+            </a:r>
+            <a:r>
+              <a:rPr sz="1700" b="0">
+                <a:solidFill>
+                  <a:srgbClr val="222222"/>
+                </a:solidFill>
+                <a:latin typeface="Consolas"/>
+                <a:cs typeface="Consolas"/>
+              </a:rPr>
+              <a:t>STANDBY</a:t>
+            </a:r>
+            <a:r>
+              <a:rPr sz="1700" b="0">
+                <a:solidFill>
+                  <a:srgbClr val="222222"/>
+                </a:solidFill>
+                <a:latin typeface="맑은 고딕"/>
+              </a:rPr>
+              <a:t> — LGU </a:t>
+            </a:r>
+            <a:r>
+              <a:rPr sz="1700" b="1">
+                <a:solidFill>
+                  <a:srgbClr val="222222"/>
+                </a:solidFill>
+                <a:latin typeface="맑은 고딕"/>
+              </a:rPr>
+              <a:t>ORA-16224</a:t>
+            </a:r>
+            <a:r>
+              <a:rPr sz="1700" b="0">
+                <a:solidFill>
+                  <a:srgbClr val="222222"/>
+                </a:solidFill>
+                <a:latin typeface="맑은 고딕"/>
+              </a:rPr>
+              <a:t> / RPT </a:t>
+            </a:r>
+            <a:r>
+              <a:rPr sz="1700" b="1">
+                <a:solidFill>
+                  <a:srgbClr val="222222"/>
+                </a:solidFill>
+                <a:latin typeface="맑은 고딕"/>
+              </a:rPr>
+              <a:t>ORA-16224</a:t>
+            </a:r>
+            <a:r>
+              <a:rPr sz="1700" b="0">
+                <a:solidFill>
+                  <a:srgbClr val="222222"/>
+                </a:solidFill>
+                <a:latin typeface="맑은 고딕"/>
+              </a:rPr>
+              <a:t> / SYS </a:t>
+            </a:r>
+            <a:r>
+              <a:rPr sz="1700" b="1">
+                <a:solidFill>
+                  <a:srgbClr val="222222"/>
+                </a:solidFill>
+                <a:latin typeface="맑은 고딕"/>
+              </a:rPr>
+              <a:t>허용</a:t>
             </a:r>
           </a:p>
           <a:p>
@@ -10360,7 +11739,71 @@
                 </a:solidFill>
                 <a:latin typeface="맑은 고딕"/>
               </a:rPr>
-              <a:t>•  `ALL` — LGU **ORA-16224** / RPT **ORA-16224** / SYS **허용**</a:t>
+              <a:t>•  </a:t>
+            </a:r>
+            <a:r>
+              <a:rPr sz="1700" b="0">
+                <a:solidFill>
+                  <a:srgbClr val="222222"/>
+                </a:solidFill>
+                <a:latin typeface="Consolas"/>
+                <a:cs typeface="Consolas"/>
+              </a:rPr>
+              <a:t>ALL</a:t>
+            </a:r>
+            <a:r>
+              <a:rPr sz="1700" b="0">
+                <a:solidFill>
+                  <a:srgbClr val="222222"/>
+                </a:solidFill>
+                <a:latin typeface="맑은 고딕"/>
+              </a:rPr>
+              <a:t> — LGU </a:t>
+            </a:r>
+            <a:r>
+              <a:rPr sz="1700" b="1">
+                <a:solidFill>
+                  <a:srgbClr val="222222"/>
+                </a:solidFill>
+                <a:latin typeface="맑은 고딕"/>
+              </a:rPr>
+              <a:t>ORA-16224</a:t>
+            </a:r>
+            <a:r>
+              <a:rPr sz="1700" b="0">
+                <a:solidFill>
+                  <a:srgbClr val="222222"/>
+                </a:solidFill>
+                <a:latin typeface="맑은 고딕"/>
+              </a:rPr>
+              <a:t> / RPT </a:t>
+            </a:r>
+            <a:r>
+              <a:rPr sz="1700" b="1">
+                <a:solidFill>
+                  <a:srgbClr val="222222"/>
+                </a:solidFill>
+                <a:latin typeface="맑은 고딕"/>
+              </a:rPr>
+              <a:t>ORA-16224</a:t>
+            </a:r>
+            <a:r>
+              <a:rPr sz="1700" b="0">
+                <a:solidFill>
+                  <a:srgbClr val="222222"/>
+                </a:solidFill>
+                <a:latin typeface="맑은 고딕"/>
+              </a:rPr>
+              <a:t> / SYS </a:t>
+            </a:r>
+            <a:r>
+              <a:rPr sz="1700" b="1">
+                <a:solidFill>
+                  <a:srgbClr val="222222"/>
+                </a:solidFill>
+                <a:latin typeface="맑은 고딕"/>
+              </a:rPr>
+              <a:t>허용</a:t>
             </a:r>
           </a:p>
           <a:p>
@@ -10376,7 +11819,16 @@
                 </a:solidFill>
                 <a:latin typeface="맑은 고딕"/>
               </a:rPr>
-              <a:t>•  문서와 달리 **STANDBY 와 ALL 이 같게 동작했다**</a:t>
+              <a:t>•  문서와 달리 </a:t>
+            </a:r>
+            <a:r>
+              <a:rPr sz="1700" b="1">
+                <a:solidFill>
+                  <a:srgbClr val="222222"/>
+                </a:solidFill>
+                <a:latin typeface="맑은 고딕"/>
+              </a:rPr>
+              <a:t>STANDBY 와 ALL 이 같게 동작했다</a:t>
             </a:r>
           </a:p>
         </p:txBody>
@@ -10555,7 +12007,64 @@
                 </a:solidFill>
                 <a:latin typeface="맑은 고딕"/>
               </a:rPr>
-              <a:t>•  가드 `ALL` 인데 SYS 가 `UPDATE` 성공, `ALTER TABLE ADD` 성공</a:t>
+              <a:t>•  가드 </a:t>
+            </a:r>
+            <a:r>
+              <a:rPr sz="1700" b="0">
+                <a:solidFill>
+                  <a:srgbClr val="222222"/>
+                </a:solidFill>
+                <a:latin typeface="Consolas"/>
+                <a:cs typeface="Consolas"/>
+              </a:rPr>
+              <a:t>ALL</a:t>
+            </a:r>
+            <a:r>
+              <a:rPr sz="1700" b="0">
+                <a:solidFill>
+                  <a:srgbClr val="222222"/>
+                </a:solidFill>
+                <a:latin typeface="맑은 고딕"/>
+              </a:rPr>
+              <a:t> 인데 SYS 가 </a:t>
+            </a:r>
+            <a:r>
+              <a:rPr sz="1700" b="0">
+                <a:solidFill>
+                  <a:srgbClr val="222222"/>
+                </a:solidFill>
+                <a:latin typeface="Consolas"/>
+                <a:cs typeface="Consolas"/>
+              </a:rPr>
+              <a:t>UPDATE</a:t>
+            </a:r>
+            <a:r>
+              <a:rPr sz="1700" b="0">
+                <a:solidFill>
+                  <a:srgbClr val="222222"/>
+                </a:solidFill>
+                <a:latin typeface="맑은 고딕"/>
+              </a:rPr>
+              <a:t> 성공, </a:t>
+            </a:r>
+            <a:r>
+              <a:rPr sz="1700" b="0">
+                <a:solidFill>
+                  <a:srgbClr val="222222"/>
+                </a:solidFill>
+                <a:latin typeface="Consolas"/>
+                <a:cs typeface="Consolas"/>
+              </a:rPr>
+              <a:t>ALTER TABLE ADD</a:t>
+            </a:r>
+            <a:r>
+              <a:rPr sz="1700" b="0">
+                <a:solidFill>
+                  <a:srgbClr val="222222"/>
+                </a:solidFill>
+                <a:latin typeface="맑은 고딕"/>
+              </a:rPr>
+              <a:t> 성공</a:t>
             </a:r>
           </a:p>
           <a:p>
@@ -10587,7 +12096,25 @@
                 </a:solidFill>
                 <a:latin typeface="맑은 고딕"/>
               </a:rPr>
-              <a:t>•  다음 리두가 도착하자 → **ORA-26676** (LCR 2컬럼 vs 테이블 3컬럼)</a:t>
+              <a:t>•  다음 리두가 도착하자 → </a:t>
+            </a:r>
+            <a:r>
+              <a:rPr sz="1700" b="1">
+                <a:solidFill>
+                  <a:srgbClr val="222222"/>
+                </a:solidFill>
+                <a:latin typeface="맑은 고딕"/>
+              </a:rPr>
+              <a:t>ORA-26676</a:t>
+            </a:r>
+            <a:r>
+              <a:rPr sz="1700" b="0">
+                <a:solidFill>
+                  <a:srgbClr val="222222"/>
+                </a:solidFill>
+                <a:latin typeface="맑은 고딕"/>
+              </a:rPr>
+              <a:t> (LCR 2컬럼 vs 테이블 3컬럼)</a:t>
             </a:r>
           </a:p>
           <a:p>
@@ -10603,7 +12130,44 @@
                 </a:solidFill>
                 <a:latin typeface="맑은 고딕"/>
               </a:rPr>
-              <a:t>•  `STATE` → **SQL APPLY NOT ON**. 복제가 죽었다</a:t>
+              <a:t>•  </a:t>
+            </a:r>
+            <a:r>
+              <a:rPr sz="1700" b="0">
+                <a:solidFill>
+                  <a:srgbClr val="222222"/>
+                </a:solidFill>
+                <a:latin typeface="Consolas"/>
+                <a:cs typeface="Consolas"/>
+              </a:rPr>
+              <a:t>STATE</a:t>
+            </a:r>
+            <a:r>
+              <a:rPr sz="1700" b="0">
+                <a:solidFill>
+                  <a:srgbClr val="222222"/>
+                </a:solidFill>
+                <a:latin typeface="맑은 고딕"/>
+              </a:rPr>
+              <a:t> → </a:t>
+            </a:r>
+            <a:r>
+              <a:rPr sz="1700" b="1">
+                <a:solidFill>
+                  <a:srgbClr val="222222"/>
+                </a:solidFill>
+                <a:latin typeface="맑은 고딕"/>
+              </a:rPr>
+              <a:t>SQL APPLY NOT ON</a:t>
+            </a:r>
+            <a:r>
+              <a:rPr sz="1700" b="0">
+                <a:solidFill>
+                  <a:srgbClr val="222222"/>
+                </a:solidFill>
+                <a:latin typeface="맑은 고딕"/>
+              </a:rPr>
+              <a:t>. 복제가 죽었다</a:t>
             </a:r>
           </a:p>
         </p:txBody>
@@ -11034,7 +12598,35 @@
                 </a:solidFill>
                 <a:latin typeface="맑은 고딕"/>
               </a:rPr>
-              <a:t>•  `ALTER SESSION DISABLE GUARD` → 권한 없으면 **ORA-01031**</a:t>
+              <a:t>•  </a:t>
+            </a:r>
+            <a:r>
+              <a:rPr sz="1700" b="0">
+                <a:solidFill>
+                  <a:srgbClr val="222222"/>
+                </a:solidFill>
+                <a:latin typeface="Consolas"/>
+                <a:cs typeface="Consolas"/>
+              </a:rPr>
+              <a:t>ALTER SESSION DISABLE GUARD</a:t>
+            </a:r>
+            <a:r>
+              <a:rPr sz="1700" b="0">
+                <a:solidFill>
+                  <a:srgbClr val="222222"/>
+                </a:solidFill>
+                <a:latin typeface="맑은 고딕"/>
+              </a:rPr>
+              <a:t> → 권한 없으면 </a:t>
+            </a:r>
+            <a:r>
+              <a:rPr sz="1700" b="1">
+                <a:solidFill>
+                  <a:srgbClr val="222222"/>
+                </a:solidFill>
+                <a:latin typeface="맑은 고딕"/>
+              </a:rPr>
+              <a:t>ORA-01031</a:t>
             </a:r>
           </a:p>
           <a:p>
@@ -11050,7 +12642,26 @@
                 </a:solidFill>
                 <a:latin typeface="맑은 고딕"/>
               </a:rPr>
-              <a:t>•  `GRANT ALTER DATABASE` 후 → 그 세션만 통과</a:t>
+              <a:t>•  </a:t>
+            </a:r>
+            <a:r>
+              <a:rPr sz="1700" b="0">
+                <a:solidFill>
+                  <a:srgbClr val="222222"/>
+                </a:solidFill>
+                <a:latin typeface="Consolas"/>
+                <a:cs typeface="Consolas"/>
+              </a:rPr>
+              <a:t>GRANT ALTER DATABASE</a:t>
+            </a:r>
+            <a:r>
+              <a:rPr sz="1700" b="0">
+                <a:solidFill>
+                  <a:srgbClr val="222222"/>
+                </a:solidFill>
+                <a:latin typeface="맑은 고딕"/>
+              </a:rPr>
+              <a:t> 후 → 그 세션만 통과</a:t>
             </a:r>
           </a:p>
           <a:p>
@@ -11066,7 +12677,35 @@
                 </a:solidFill>
                 <a:latin typeface="맑은 고딕"/>
               </a:rPr>
-              <a:t>•  `GUARD NONE` 전체 개방 — 위험 **크다**</a:t>
+              <a:t>•  </a:t>
+            </a:r>
+            <a:r>
+              <a:rPr sz="1700" b="0">
+                <a:solidFill>
+                  <a:srgbClr val="222222"/>
+                </a:solidFill>
+                <a:latin typeface="Consolas"/>
+                <a:cs typeface="Consolas"/>
+              </a:rPr>
+              <a:t>GUARD NONE</a:t>
+            </a:r>
+            <a:r>
+              <a:rPr sz="1700" b="0">
+                <a:solidFill>
+                  <a:srgbClr val="222222"/>
+                </a:solidFill>
+                <a:latin typeface="맑은 고딕"/>
+              </a:rPr>
+              <a:t> 전체 개방 — 위험 </a:t>
+            </a:r>
+            <a:r>
+              <a:rPr sz="1700" b="1">
+                <a:solidFill>
+                  <a:srgbClr val="222222"/>
+                </a:solidFill>
+                <a:latin typeface="맑은 고딕"/>
+              </a:rPr>
+              <a:t>크다</a:t>
             </a:r>
           </a:p>
           <a:p>
@@ -11082,7 +12721,34 @@
                 </a:solidFill>
                 <a:latin typeface="맑은 고딕"/>
               </a:rPr>
-              <a:t>•  세션 단위 — 위험 **작다** / SYS 접속 — **가장 크다**</a:t>
+              <a:t>•  세션 단위 — 위험 </a:t>
+            </a:r>
+            <a:r>
+              <a:rPr sz="1700" b="1">
+                <a:solidFill>
+                  <a:srgbClr val="222222"/>
+                </a:solidFill>
+                <a:latin typeface="맑은 고딕"/>
+              </a:rPr>
+              <a:t>작다</a:t>
+            </a:r>
+            <a:r>
+              <a:rPr sz="1700" b="0">
+                <a:solidFill>
+                  <a:srgbClr val="222222"/>
+                </a:solidFill>
+                <a:latin typeface="맑은 고딕"/>
+              </a:rPr>
+              <a:t> / SYS 접속 — </a:t>
+            </a:r>
+            <a:r>
+              <a:rPr sz="1700" b="1">
+                <a:solidFill>
+                  <a:srgbClr val="222222"/>
+                </a:solidFill>
+                <a:latin typeface="맑은 고딕"/>
+              </a:rPr>
+              <a:t>가장 크다</a:t>
             </a:r>
           </a:p>
         </p:txBody>
@@ -11500,7 +13166,35 @@
                 </a:solidFill>
                 <a:latin typeface="맑은 고딕"/>
               </a:rPr>
-              <a:t>•  ① 원인 확인 `DBA_LOGSTDBY_EVENTS` → **ORA-26676**</a:t>
+              <a:t>•  ① 원인 확인 </a:t>
+            </a:r>
+            <a:r>
+              <a:rPr sz="1700" b="0">
+                <a:solidFill>
+                  <a:srgbClr val="222222"/>
+                </a:solidFill>
+                <a:latin typeface="Consolas"/>
+                <a:cs typeface="Consolas"/>
+              </a:rPr>
+              <a:t>DBA_LOGSTDBY_EVENTS</a:t>
+            </a:r>
+            <a:r>
+              <a:rPr sz="1700" b="0">
+                <a:solidFill>
+                  <a:srgbClr val="222222"/>
+                </a:solidFill>
+                <a:latin typeface="맑은 고딕"/>
+              </a:rPr>
+              <a:t> → </a:t>
+            </a:r>
+            <a:r>
+              <a:rPr sz="1700" b="1">
+                <a:solidFill>
+                  <a:srgbClr val="222222"/>
+                </a:solidFill>
+                <a:latin typeface="맑은 고딕"/>
+              </a:rPr>
+              <a:t>ORA-26676</a:t>
             </a:r>
           </a:p>
           <a:p>
@@ -11516,7 +13210,35 @@
                 </a:solidFill>
                 <a:latin typeface="맑은 고딕"/>
               </a:rPr>
-              <a:t>•  ② 구조 복원 `DROP COLUMN` → 다음 오류 **ORA-26786**</a:t>
+              <a:t>•  ② 구조 복원 </a:t>
+            </a:r>
+            <a:r>
+              <a:rPr sz="1700" b="0">
+                <a:solidFill>
+                  <a:srgbClr val="222222"/>
+                </a:solidFill>
+                <a:latin typeface="Consolas"/>
+                <a:cs typeface="Consolas"/>
+              </a:rPr>
+              <a:t>DROP COLUMN</a:t>
+            </a:r>
+            <a:r>
+              <a:rPr sz="1700" b="0">
+                <a:solidFill>
+                  <a:srgbClr val="222222"/>
+                </a:solidFill>
+                <a:latin typeface="맑은 고딕"/>
+              </a:rPr>
+              <a:t> → 다음 오류 </a:t>
+            </a:r>
+            <a:r>
+              <a:rPr sz="1700" b="1">
+                <a:solidFill>
+                  <a:srgbClr val="222222"/>
+                </a:solidFill>
+                <a:latin typeface="맑은 고딕"/>
+              </a:rPr>
+              <a:t>ORA-26786</a:t>
             </a:r>
           </a:p>
           <a:p>
@@ -11532,7 +13254,25 @@
                 </a:solidFill>
                 <a:latin typeface="맑은 고딕"/>
               </a:rPr>
-              <a:t>•  ③ 가드 완화 (PDB 에서 하면 **ORA-65040**)</a:t>
+              <a:t>•  ③ 가드 완화 (PDB 에서 하면 </a:t>
+            </a:r>
+            <a:r>
+              <a:rPr sz="1700" b="1">
+                <a:solidFill>
+                  <a:srgbClr val="222222"/>
+                </a:solidFill>
+                <a:latin typeface="맑은 고딕"/>
+              </a:rPr>
+              <a:t>ORA-65040</a:t>
+            </a:r>
+            <a:r>
+              <a:rPr sz="1700" b="0">
+                <a:solidFill>
+                  <a:srgbClr val="222222"/>
+                </a:solidFill>
+                <a:latin typeface="맑은 고딕"/>
+              </a:rPr>
+              <a:t>)</a:t>
             </a:r>
           </a:p>
           <a:p>
@@ -11548,7 +13288,25 @@
                 </a:solidFill>
                 <a:latin typeface="맑은 고딕"/>
               </a:rPr>
-              <a:t>•  ④ 링크 준비 (권한 부족 시 **ORA-31631**)</a:t>
+              <a:t>•  ④ 링크 준비 (권한 부족 시 </a:t>
+            </a:r>
+            <a:r>
+              <a:rPr sz="1700" b="1">
+                <a:solidFill>
+                  <a:srgbClr val="222222"/>
+                </a:solidFill>
+                <a:latin typeface="맑은 고딕"/>
+              </a:rPr>
+              <a:t>ORA-31631</a:t>
+            </a:r>
+            <a:r>
+              <a:rPr sz="1700" b="0">
+                <a:solidFill>
+                  <a:srgbClr val="222222"/>
+                </a:solidFill>
+                <a:latin typeface="맑은 고딕"/>
+              </a:rPr>
+              <a:t>)</a:t>
             </a:r>
           </a:p>
           <a:p>
@@ -11564,7 +13322,26 @@
                 </a:solidFill>
                 <a:latin typeface="맑은 고딕"/>
               </a:rPr>
-              <a:t>•  ⑤ 재적재 `INSTANTIATE_TABLE` → ⑥ 재개·검증 지연 0</a:t>
+              <a:t>•  ⑤ 재적재 </a:t>
+            </a:r>
+            <a:r>
+              <a:rPr sz="1700" b="0">
+                <a:solidFill>
+                  <a:srgbClr val="222222"/>
+                </a:solidFill>
+                <a:latin typeface="Consolas"/>
+                <a:cs typeface="Consolas"/>
+              </a:rPr>
+              <a:t>INSTANTIATE_TABLE</a:t>
+            </a:r>
+            <a:r>
+              <a:rPr sz="1700" b="0">
+                <a:solidFill>
+                  <a:srgbClr val="222222"/>
+                </a:solidFill>
+                <a:latin typeface="맑은 고딕"/>
+              </a:rPr>
+              <a:t> → ⑥ 재개·검증 지연 0</a:t>
             </a:r>
           </a:p>
         </p:txBody>
@@ -11743,7 +13520,17 @@
                 </a:solidFill>
                 <a:latin typeface="맑은 고딕"/>
               </a:rPr>
-              <a:t>•  ORA-26676 → 컬럼 제거 → 적용 재개 → 여전히 `SQL APPLY NOT ON`</a:t>
+              <a:t>•  ORA-26676 → 컬럼 제거 → 적용 재개 → 여전히 </a:t>
+            </a:r>
+            <a:r>
+              <a:rPr sz="1700" b="0">
+                <a:solidFill>
+                  <a:srgbClr val="222222"/>
+                </a:solidFill>
+                <a:latin typeface="Consolas"/>
+                <a:cs typeface="Consolas"/>
+              </a:rPr>
+              <a:t>SQL APPLY NOT ON</a:t>
             </a:r>
           </a:p>
           <a:p>
@@ -11759,7 +13546,17 @@
                 </a:solidFill>
                 <a:latin typeface="맑은 고딕"/>
               </a:rPr>
-              <a:t>•  새 오류 — `A row with key ("ID") = (1) exists but has conflicting column(s) "TAG"`</a:t>
+              <a:t>•  새 오류 — </a:t>
+            </a:r>
+            <a:r>
+              <a:rPr sz="1700" b="0">
+                <a:solidFill>
+                  <a:srgbClr val="222222"/>
+                </a:solidFill>
+                <a:latin typeface="Consolas"/>
+                <a:cs typeface="Consolas"/>
+              </a:rPr>
+              <a:t>A row with key ("ID") = (1) exists but has conflicting column(s) "TAG"</a:t>
             </a:r>
           </a:p>
           <a:p>
@@ -11775,7 +13572,36 @@
                 </a:solidFill>
                 <a:latin typeface="맑은 고딕"/>
               </a:rPr>
-              <a:t>•  Primary `primary-update` vs Standby `changed-here`</a:t>
+              <a:t>•  Primary </a:t>
+            </a:r>
+            <a:r>
+              <a:rPr sz="1700" b="0">
+                <a:solidFill>
+                  <a:srgbClr val="222222"/>
+                </a:solidFill>
+                <a:latin typeface="Consolas"/>
+                <a:cs typeface="Consolas"/>
+              </a:rPr>
+              <a:t>primary-update</a:t>
+            </a:r>
+            <a:r>
+              <a:rPr sz="1700" b="0">
+                <a:solidFill>
+                  <a:srgbClr val="222222"/>
+                </a:solidFill>
+                <a:latin typeface="맑은 고딕"/>
+              </a:rPr>
+              <a:t> vs Standby </a:t>
+            </a:r>
+            <a:r>
+              <a:rPr sz="1700" b="0">
+                <a:solidFill>
+                  <a:srgbClr val="222222"/>
+                </a:solidFill>
+                <a:latin typeface="Consolas"/>
+                <a:cs typeface="Consolas"/>
+              </a:rPr>
+              <a:t>changed-here</a:t>
             </a:r>
           </a:p>
           <a:p>
@@ -11970,7 +13796,17 @@
                 </a:solidFill>
                 <a:latin typeface="맑은 고딕"/>
               </a:rPr>
-              <a:t>•  `DBMS_LOGSTDBY.INSTANTIATE_TABLE(schema_name, table_name, dblink)`</a:t>
+              <a:t>•  </a:t>
+            </a:r>
+            <a:r>
+              <a:rPr sz="1700" b="0">
+                <a:solidFill>
+                  <a:srgbClr val="222222"/>
+                </a:solidFill>
+                <a:latin typeface="Consolas"/>
+                <a:cs typeface="Consolas"/>
+              </a:rPr>
+              <a:t>DBMS_LOGSTDBY.INSTANTIATE_TABLE(schema_name, table_name, dblink)</a:t>
             </a:r>
           </a:p>
           <a:p>
@@ -12002,7 +13838,44 @@
                 </a:solidFill>
                 <a:latin typeface="맑은 고딕"/>
               </a:rPr>
-              <a:t>•  실패 — **ORA-31631** (스택에 `DBMS_DATAPUMP`)</a:t>
+              <a:t>•  실패 — </a:t>
+            </a:r>
+            <a:r>
+              <a:rPr sz="1700" b="1">
+                <a:solidFill>
+                  <a:srgbClr val="222222"/>
+                </a:solidFill>
+                <a:latin typeface="맑은 고딕"/>
+              </a:rPr>
+              <a:t>ORA-31631</a:t>
+            </a:r>
+            <a:r>
+              <a:rPr sz="1700" b="0">
+                <a:solidFill>
+                  <a:srgbClr val="222222"/>
+                </a:solidFill>
+                <a:latin typeface="맑은 고딕"/>
+              </a:rPr>
+              <a:t> (스택에 </a:t>
+            </a:r>
+            <a:r>
+              <a:rPr sz="1700" b="0">
+                <a:solidFill>
+                  <a:srgbClr val="222222"/>
+                </a:solidFill>
+                <a:latin typeface="Consolas"/>
+                <a:cs typeface="Consolas"/>
+              </a:rPr>
+              <a:t>DBMS_DATAPUMP</a:t>
+            </a:r>
+            <a:r>
+              <a:rPr sz="1700" b="0">
+                <a:solidFill>
+                  <a:srgbClr val="222222"/>
+                </a:solidFill>
+                <a:latin typeface="맑은 고딕"/>
+              </a:rPr>
+              <a:t>)</a:t>
             </a:r>
           </a:p>
           <a:p>
@@ -12018,7 +13891,17 @@
                 </a:solidFill>
                 <a:latin typeface="맑은 고딕"/>
               </a:rPr>
-              <a:t>•  해결 — `GRANT datapump_exp_full_database`</a:t>
+              <a:t>•  해결 — </a:t>
+            </a:r>
+            <a:r>
+              <a:rPr sz="1700" b="0">
+                <a:solidFill>
+                  <a:srgbClr val="222222"/>
+                </a:solidFill>
+                <a:latin typeface="Consolas"/>
+                <a:cs typeface="Consolas"/>
+              </a:rPr>
+              <a:t>GRANT datapump_exp_full_database</a:t>
             </a:r>
           </a:p>
           <a:p>
@@ -12213,7 +14096,35 @@
                 </a:solidFill>
                 <a:latin typeface="맑은 고딕"/>
               </a:rPr>
-              <a:t>•  오류가 났는데 **테이블이 사라졌다** — `ORA-00942`</a:t>
+              <a:t>•  오류가 났는데 </a:t>
+            </a:r>
+            <a:r>
+              <a:rPr sz="1700" b="1">
+                <a:solidFill>
+                  <a:srgbClr val="222222"/>
+                </a:solidFill>
+                <a:latin typeface="맑은 고딕"/>
+              </a:rPr>
+              <a:t>테이블이 사라졌다</a:t>
+            </a:r>
+            <a:r>
+              <a:rPr sz="1700" b="0">
+                <a:solidFill>
+                  <a:srgbClr val="222222"/>
+                </a:solidFill>
+                <a:latin typeface="맑은 고딕"/>
+              </a:rPr>
+              <a:t> — </a:t>
+            </a:r>
+            <a:r>
+              <a:rPr sz="1700" b="0">
+                <a:solidFill>
+                  <a:srgbClr val="222222"/>
+                </a:solidFill>
+                <a:latin typeface="Consolas"/>
+                <a:cs typeface="Consolas"/>
+              </a:rPr>
+              <a:t>ORA-00942</a:t>
             </a:r>
           </a:p>
           <a:p>
@@ -12229,7 +14140,44 @@
                 </a:solidFill>
                 <a:latin typeface="맑은 고딕"/>
               </a:rPr>
-              <a:t>•  `INSTANTIATE_TABLE` 은 **먼저 지우고** 새로 가져온다</a:t>
+              <a:t>•  </a:t>
+            </a:r>
+            <a:r>
+              <a:rPr sz="1700" b="0">
+                <a:solidFill>
+                  <a:srgbClr val="222222"/>
+                </a:solidFill>
+                <a:latin typeface="Consolas"/>
+                <a:cs typeface="Consolas"/>
+              </a:rPr>
+              <a:t>INSTANTIATE_TABLE</a:t>
+            </a:r>
+            <a:r>
+              <a:rPr sz="1700" b="0">
+                <a:solidFill>
+                  <a:srgbClr val="222222"/>
+                </a:solidFill>
+                <a:latin typeface="맑은 고딕"/>
+              </a:rPr>
+              <a:t> 은 </a:t>
+            </a:r>
+            <a:r>
+              <a:rPr sz="1700" b="1">
+                <a:solidFill>
+                  <a:srgbClr val="222222"/>
+                </a:solidFill>
+                <a:latin typeface="맑은 고딕"/>
+              </a:rPr>
+              <a:t>먼저 지우고</a:t>
+            </a:r>
+            <a:r>
+              <a:rPr sz="1700" b="0">
+                <a:solidFill>
+                  <a:srgbClr val="222222"/>
+                </a:solidFill>
+                <a:latin typeface="맑은 고딕"/>
+              </a:rPr>
+              <a:t> 새로 가져온다</a:t>
             </a:r>
           </a:p>
           <a:p>
@@ -12245,7 +14193,25 @@
                 </a:solidFill>
                 <a:latin typeface="맑은 고딕"/>
               </a:rPr>
-              <a:t>•  권한 오류가 지운 **뒤에** 났다</a:t>
+              <a:t>•  권한 오류가 지운 </a:t>
+            </a:r>
+            <a:r>
+              <a:rPr sz="1700" b="1">
+                <a:solidFill>
+                  <a:srgbClr val="222222"/>
+                </a:solidFill>
+                <a:latin typeface="맑은 고딕"/>
+              </a:rPr>
+              <a:t>뒤에</a:t>
+            </a:r>
+            <a:r>
+              <a:rPr sz="1700" b="0">
+                <a:solidFill>
+                  <a:srgbClr val="222222"/>
+                </a:solidFill>
+                <a:latin typeface="맑은 고딕"/>
+              </a:rPr>
+              <a:t> 났다</a:t>
             </a:r>
           </a:p>
           <a:p>
@@ -12261,7 +14227,26 @@
                 </a:solidFill>
                 <a:latin typeface="맑은 고딕"/>
               </a:rPr>
-              <a:t>•  실무 순서 — ① 링크로 SELECT 해 보기 ② `DBA_ROLE_PRIVS` 확인 ③ 재적재</a:t>
+              <a:t>•  실무 순서 — ① 링크로 SELECT 해 보기 ② </a:t>
+            </a:r>
+            <a:r>
+              <a:rPr sz="1700" b="0">
+                <a:solidFill>
+                  <a:srgbClr val="222222"/>
+                </a:solidFill>
+                <a:latin typeface="Consolas"/>
+                <a:cs typeface="Consolas"/>
+              </a:rPr>
+              <a:t>DBA_ROLE_PRIVS</a:t>
+            </a:r>
+            <a:r>
+              <a:rPr sz="1700" b="0">
+                <a:solidFill>
+                  <a:srgbClr val="222222"/>
+                </a:solidFill>
+                <a:latin typeface="맑은 고딕"/>
+              </a:rPr>
+              <a:t> 확인 ③ 재적재</a:t>
             </a:r>
           </a:p>
         </p:txBody>
@@ -12679,7 +14664,25 @@
                 </a:solidFill>
                 <a:latin typeface="맑은 고딕"/>
               </a:rPr>
-              <a:t>•  **적합** — 보고서용 자체 인덱스 / 일부만 복제 / 롤링 업그레이드 / 단순한 데이터</a:t>
+              <a:t>•  </a:t>
+            </a:r>
+            <a:r>
+              <a:rPr sz="1700" b="1">
+                <a:solidFill>
+                  <a:srgbClr val="222222"/>
+                </a:solidFill>
+                <a:latin typeface="맑은 고딕"/>
+              </a:rPr>
+              <a:t>적합</a:t>
+            </a:r>
+            <a:r>
+              <a:rPr sz="1700" b="0">
+                <a:solidFill>
+                  <a:srgbClr val="222222"/>
+                </a:solidFill>
+                <a:latin typeface="맑은 고딕"/>
+              </a:rPr>
+              <a:t> — 보고서용 자체 인덱스 / 일부만 복제 / 롤링 업그레이드 / 단순한 데이터</a:t>
             </a:r>
           </a:p>
           <a:p>
@@ -12695,7 +14698,25 @@
                 </a:solidFill>
                 <a:latin typeface="맑은 고딕"/>
               </a:rPr>
-              <a:t>•  **부적합** — 재해 복구가 주 목적 / 지원 안 되는 타입이 핵심 / 관리 인력 부족</a:t>
+              <a:t>•  </a:t>
+            </a:r>
+            <a:r>
+              <a:rPr sz="1700" b="1">
+                <a:solidFill>
+                  <a:srgbClr val="222222"/>
+                </a:solidFill>
+                <a:latin typeface="맑은 고딕"/>
+              </a:rPr>
+              <a:t>부적합</a:t>
+            </a:r>
+            <a:r>
+              <a:rPr sz="1700" b="0">
+                <a:solidFill>
+                  <a:srgbClr val="222222"/>
+                </a:solidFill>
+                <a:latin typeface="맑은 고딕"/>
+              </a:rPr>
+              <a:t> — 재해 복구가 주 목적 / 지원 안 되는 타입이 핵심 / 관리 인력 부족</a:t>
             </a:r>
           </a:p>
           <a:p>
@@ -12711,7 +14732,25 @@
                 </a:solidFill>
                 <a:latin typeface="맑은 고딕"/>
               </a:rPr>
-              <a:t>•  **부적합** — 이기종·양방향 필요 / 되돌릴 여지를 남겨야 할 때</a:t>
+              <a:t>•  </a:t>
+            </a:r>
+            <a:r>
+              <a:rPr sz="1700" b="1">
+                <a:solidFill>
+                  <a:srgbClr val="222222"/>
+                </a:solidFill>
+                <a:latin typeface="맑은 고딕"/>
+              </a:rPr>
+              <a:t>부적합</a:t>
+            </a:r>
+            <a:r>
+              <a:rPr sz="1700" b="0">
+                <a:solidFill>
+                  <a:srgbClr val="222222"/>
+                </a:solidFill>
+                <a:latin typeface="맑은 고딕"/>
+              </a:rPr>
+              <a:t> — 이기종·양방향 필요 / 되돌릴 여지를 남겨야 할 때</a:t>
             </a:r>
           </a:p>
           <a:p>
@@ -12727,7 +14766,25 @@
                 </a:solidFill>
                 <a:latin typeface="맑은 고딕"/>
               </a:rPr>
-              <a:t>•  Physical Standby 를 두고 **하나를 더 얹어** Logical 로 만든다</a:t>
+              <a:t>•  Physical Standby 를 두고 </a:t>
+            </a:r>
+            <a:r>
+              <a:rPr sz="1700" b="1">
+                <a:solidFill>
+                  <a:srgbClr val="222222"/>
+                </a:solidFill>
+                <a:latin typeface="맑은 고딕"/>
+              </a:rPr>
+              <a:t>하나를 더 얹어</a:t>
+            </a:r>
+            <a:r>
+              <a:rPr sz="1700" b="0">
+                <a:solidFill>
+                  <a:srgbClr val="222222"/>
+                </a:solidFill>
+                <a:latin typeface="맑은 고딕"/>
+              </a:rPr>
+              <a:t> Logical 로 만든다</a:t>
             </a:r>
           </a:p>
         </p:txBody>
@@ -12906,7 +14963,26 @@
                 </a:solidFill>
                 <a:latin typeface="맑은 고딕"/>
               </a:rPr>
-              <a:t>•  ① 전환할 때의 `BUILD` 순서 — 적용이 돌아서 딕셔너리를 지나쳤다</a:t>
+              <a:t>•  ① 전환할 때의 </a:t>
+            </a:r>
+            <a:r>
+              <a:rPr sz="1700" b="0">
+                <a:solidFill>
+                  <a:srgbClr val="222222"/>
+                </a:solidFill>
+                <a:latin typeface="Consolas"/>
+                <a:cs typeface="Consolas"/>
+              </a:rPr>
+              <a:t>BUILD</a:t>
+            </a:r>
+            <a:r>
+              <a:rPr sz="1700" b="0">
+                <a:solidFill>
+                  <a:srgbClr val="222222"/>
+                </a:solidFill>
+                <a:latin typeface="맑은 고딕"/>
+              </a:rPr>
+              <a:t> 순서 — 적용이 돌아서 딕셔너리를 지나쳤다</a:t>
             </a:r>
           </a:p>
           <a:p>
@@ -12938,7 +15014,35 @@
                 </a:solidFill>
                 <a:latin typeface="맑은 고딕"/>
               </a:rPr>
-              <a:t>•  ③ 파라미터 되돌리기 — `APPLY_SERVERS` 가 커서 **ORA-16081**</a:t>
+              <a:t>•  ③ 파라미터 되돌리기 — </a:t>
+            </a:r>
+            <a:r>
+              <a:rPr sz="1700" b="0">
+                <a:solidFill>
+                  <a:srgbClr val="222222"/>
+                </a:solidFill>
+                <a:latin typeface="Consolas"/>
+                <a:cs typeface="Consolas"/>
+              </a:rPr>
+              <a:t>APPLY_SERVERS</a:t>
+            </a:r>
+            <a:r>
+              <a:rPr sz="1700" b="0">
+                <a:solidFill>
+                  <a:srgbClr val="222222"/>
+                </a:solidFill>
+                <a:latin typeface="맑은 고딕"/>
+              </a:rPr>
+              <a:t> 가 커서 </a:t>
+            </a:r>
+            <a:r>
+              <a:rPr sz="1700" b="1">
+                <a:solidFill>
+                  <a:srgbClr val="222222"/>
+                </a:solidFill>
+                <a:latin typeface="맑은 고딕"/>
+              </a:rPr>
+              <a:t>ORA-16081</a:t>
             </a:r>
           </a:p>
           <a:p>
@@ -12954,7 +15058,16 @@
                 </a:solidFill>
                 <a:latin typeface="맑은 고딕"/>
               </a:rPr>
-              <a:t>•  공통점 — 셋 다 **명령 자체는 성공했다**</a:t>
+              <a:t>•  공통점 — 셋 다 </a:t>
+            </a:r>
+            <a:r>
+              <a:rPr sz="1700" b="1">
+                <a:solidFill>
+                  <a:srgbClr val="222222"/>
+                </a:solidFill>
+                <a:latin typeface="맑은 고딕"/>
+              </a:rPr>
+              <a:t>명령 자체는 성공했다</a:t>
             </a:r>
           </a:p>
         </p:txBody>
@@ -13094,7 +15207,43 @@
                 </a:solidFill>
                 <a:latin typeface="맑은 고딕"/>
               </a:rPr>
-              <a:t>•  Logical Standby 는 리두를 **SQL 로 재구성해 실행**한다. 이것이 **SQL Apply**.</a:t>
+              <a:t>•  Logical Standby 는 리두를 </a:t>
+            </a:r>
+            <a:r>
+              <a:rPr sz="1600" b="1">
+                <a:solidFill>
+                  <a:srgbClr val="222222"/>
+                </a:solidFill>
+                <a:latin typeface="맑은 고딕"/>
+              </a:rPr>
+              <a:t>SQL 로 재구성해 실행</a:t>
+            </a:r>
+            <a:r>
+              <a:rPr sz="1600" b="0">
+                <a:solidFill>
+                  <a:srgbClr val="222222"/>
+                </a:solidFill>
+                <a:latin typeface="맑은 고딕"/>
+              </a:rPr>
+              <a:t>한다. 이것이 </a:t>
+            </a:r>
+            <a:r>
+              <a:rPr sz="1600" b="1">
+                <a:solidFill>
+                  <a:srgbClr val="222222"/>
+                </a:solidFill>
+                <a:latin typeface="맑은 고딕"/>
+              </a:rPr>
+              <a:t>SQL Apply</a:t>
+            </a:r>
+            <a:r>
+              <a:rPr sz="1600" b="0">
+                <a:solidFill>
+                  <a:srgbClr val="222222"/>
+                </a:solidFill>
+                <a:latin typeface="맑은 고딕"/>
+              </a:rPr>
+              <a:t>.</a:t>
             </a:r>
           </a:p>
           <a:p>
@@ -13110,7 +15259,44 @@
                 </a:solidFill>
                 <a:latin typeface="맑은 고딕"/>
               </a:rPr>
-              <a:t>•  전환은 **되돌릴 수 없다.** 실습은 VM 스냅샷 `pre-logical` 로 대비했다.</a:t>
+              <a:t>•  전환은 </a:t>
+            </a:r>
+            <a:r>
+              <a:rPr sz="1600" b="1">
+                <a:solidFill>
+                  <a:srgbClr val="222222"/>
+                </a:solidFill>
+                <a:latin typeface="맑은 고딕"/>
+              </a:rPr>
+              <a:t>되돌릴 수 없다.</a:t>
+            </a:r>
+            <a:r>
+              <a:rPr sz="1600" b="0">
+                <a:solidFill>
+                  <a:srgbClr val="222222"/>
+                </a:solidFill>
+                <a:latin typeface="맑은 고딕"/>
+              </a:rPr>
+              <a:t> 실습은 VM 스냅샷 </a:t>
+            </a:r>
+            <a:r>
+              <a:rPr sz="1600" b="0">
+                <a:solidFill>
+                  <a:srgbClr val="222222"/>
+                </a:solidFill>
+                <a:latin typeface="Consolas"/>
+                <a:cs typeface="Consolas"/>
+              </a:rPr>
+              <a:t>pre-logical</a:t>
+            </a:r>
+            <a:r>
+              <a:rPr sz="1600" b="0">
+                <a:solidFill>
+                  <a:srgbClr val="222222"/>
+                </a:solidFill>
+                <a:latin typeface="맑은 고딕"/>
+              </a:rPr>
+              <a:t> 로 대비했다.</a:t>
             </a:r>
           </a:p>
           <a:p>
@@ -13126,7 +15312,25 @@
                 </a:solidFill>
                 <a:latin typeface="맑은 고딕"/>
               </a:rPr>
-              <a:t>•  점검 뷰 셋 — UNSUPPORTED(0행) / NOT_UNIQUE(0행) / SKIP(**35개**).</a:t>
+              <a:t>•  점검 뷰 셋 — UNSUPPORTED(0행) / NOT_UNIQUE(0행) / SKIP(</a:t>
+            </a:r>
+            <a:r>
+              <a:rPr sz="1600" b="1">
+                <a:solidFill>
+                  <a:srgbClr val="222222"/>
+                </a:solidFill>
+                <a:latin typeface="맑은 고딕"/>
+              </a:rPr>
+              <a:t>35개</a:t>
+            </a:r>
+            <a:r>
+              <a:rPr sz="1600" b="0">
+                <a:solidFill>
+                  <a:srgbClr val="222222"/>
+                </a:solidFill>
+                <a:latin typeface="맑은 고딕"/>
+              </a:rPr>
+              <a:t>).</a:t>
             </a:r>
           </a:p>
           <a:p>
@@ -13142,7 +15346,54 @@
                 </a:solidFill>
                 <a:latin typeface="맑은 고딕"/>
               </a:rPr>
-              <a:t>•  **`SYSTEM` 스키마는 복제되지 않는다.** 실측 `ORA-00942`.</a:t>
+              <a:t>•  </a:t>
+            </a:r>
+            <a:r>
+              <a:rPr sz="1600" b="1">
+                <a:solidFill>
+                  <a:srgbClr val="222222"/>
+                </a:solidFill>
+                <a:latin typeface="Consolas"/>
+                <a:cs typeface="Consolas"/>
+              </a:rPr>
+              <a:t>SYSTEM</a:t>
+            </a:r>
+            <a:r>
+              <a:rPr sz="1600" b="1">
+                <a:solidFill>
+                  <a:srgbClr val="222222"/>
+                </a:solidFill>
+                <a:latin typeface="맑은 고딕"/>
+              </a:rPr>
+              <a:t> 스키마는 복제되지 않는다.</a:t>
+            </a:r>
+            <a:r>
+              <a:rPr sz="1600" b="0">
+                <a:solidFill>
+                  <a:srgbClr val="222222"/>
+                </a:solidFill>
+                <a:latin typeface="맑은 고딕"/>
+              </a:rPr>
+              <a:t> 실측 </a:t>
+            </a:r>
+            <a:r>
+              <a:rPr sz="1600" b="0">
+                <a:solidFill>
+                  <a:srgbClr val="222222"/>
+                </a:solidFill>
+                <a:latin typeface="Consolas"/>
+                <a:cs typeface="Consolas"/>
+              </a:rPr>
+              <a:t>ORA-00942</a:t>
+            </a:r>
+            <a:r>
+              <a:rPr sz="1600" b="0">
+                <a:solidFill>
+                  <a:srgbClr val="222222"/>
+                </a:solidFill>
+                <a:latin typeface="맑은 고딕"/>
+              </a:rPr>
+              <a:t>.</a:t>
             </a:r>
           </a:p>
           <a:p>
@@ -13158,7 +15409,63 @@
                 </a:solidFill>
                 <a:latin typeface="맑은 고딕"/>
               </a:rPr>
-              <a:t>•  `DBMS_LOGSTDBY.BUILD` 가 **보충 로깅을 자동으로 켠다** — `MN=IMPLICIT`.</a:t>
+              <a:t>•  </a:t>
+            </a:r>
+            <a:r>
+              <a:rPr sz="1600" b="0">
+                <a:solidFill>
+                  <a:srgbClr val="222222"/>
+                </a:solidFill>
+                <a:latin typeface="Consolas"/>
+                <a:cs typeface="Consolas"/>
+              </a:rPr>
+              <a:t>DBMS_LOGSTDBY.BUILD</a:t>
+            </a:r>
+            <a:r>
+              <a:rPr sz="1600" b="0">
+                <a:solidFill>
+                  <a:srgbClr val="222222"/>
+                </a:solidFill>
+                <a:latin typeface="맑은 고딕"/>
+              </a:rPr>
+              <a:t> 가 </a:t>
+            </a:r>
+            <a:r>
+              <a:rPr sz="1600" b="1">
+                <a:solidFill>
+                  <a:srgbClr val="222222"/>
+                </a:solidFill>
+                <a:latin typeface="맑은 고딕"/>
+              </a:rPr>
+              <a:t>보충 로깅을 자동으로 켠다</a:t>
+            </a:r>
+            <a:r>
+              <a:rPr sz="1600" b="0">
+                <a:solidFill>
+                  <a:srgbClr val="222222"/>
+                </a:solidFill>
+                <a:latin typeface="맑은 고딕"/>
+              </a:rPr>
+              <a:t> — </a:t>
+            </a:r>
+            <a:r>
+              <a:rPr sz="1600" b="0">
+                <a:solidFill>
+                  <a:srgbClr val="222222"/>
+                </a:solidFill>
+                <a:latin typeface="Consolas"/>
+                <a:cs typeface="Consolas"/>
+              </a:rPr>
+              <a:t>MN=IMPLICIT</a:t>
+            </a:r>
+            <a:r>
+              <a:rPr sz="1600" b="0">
+                <a:solidFill>
+                  <a:srgbClr val="222222"/>
+                </a:solidFill>
+                <a:latin typeface="맑은 고딕"/>
+              </a:rPr>
+              <a:t>.</a:t>
             </a:r>
           </a:p>
           <a:p>
@@ -13174,7 +15481,53 @@
                 </a:solidFill>
                 <a:latin typeface="맑은 고딕"/>
               </a:rPr>
-              <a:t>•  딕셔너리는 **리두를 타고** 간다. MRP 가 지나치면 전환이 멈추므로 **다시 `BUILD`**.</a:t>
+              <a:t>•  딕셔너리는 </a:t>
+            </a:r>
+            <a:r>
+              <a:rPr sz="1600" b="1">
+                <a:solidFill>
+                  <a:srgbClr val="222222"/>
+                </a:solidFill>
+                <a:latin typeface="맑은 고딕"/>
+              </a:rPr>
+              <a:t>리두를 타고</a:t>
+            </a:r>
+            <a:r>
+              <a:rPr sz="1600" b="0">
+                <a:solidFill>
+                  <a:srgbClr val="222222"/>
+                </a:solidFill>
+                <a:latin typeface="맑은 고딕"/>
+              </a:rPr>
+              <a:t> 간다. MRP 가 지나치면 전환이 멈추므로 </a:t>
+            </a:r>
+            <a:r>
+              <a:rPr sz="1600" b="1">
+                <a:solidFill>
+                  <a:srgbClr val="222222"/>
+                </a:solidFill>
+                <a:latin typeface="맑은 고딕"/>
+              </a:rPr>
+              <a:t>다시 </a:t>
+            </a:r>
+            <a:r>
+              <a:rPr sz="1600" b="1">
+                <a:solidFill>
+                  <a:srgbClr val="222222"/>
+                </a:solidFill>
+                <a:latin typeface="Consolas"/>
+                <a:cs typeface="Consolas"/>
+              </a:rPr>
+              <a:t>BUILD</a:t>
+            </a:r>
+            <a:r>
+              <a:rPr sz="1600" b="0">
+                <a:solidFill>
+                  <a:srgbClr val="222222"/>
+                </a:solidFill>
+                <a:latin typeface="맑은 고딕"/>
+              </a:rPr>
+              <a:t>.</a:t>
             </a:r>
           </a:p>
           <a:p>
@@ -13190,7 +15543,83 @@
                 </a:solidFill>
                 <a:latin typeface="맑은 고딕"/>
               </a:rPr>
-              <a:t>•  전환 결과 — `LOGICAL STANDBY` / `CURRENT` / `GUARD ALL` / **`CDB=YES`**.</a:t>
+              <a:t>•  전환 결과 — </a:t>
+            </a:r>
+            <a:r>
+              <a:rPr sz="1600" b="0">
+                <a:solidFill>
+                  <a:srgbClr val="222222"/>
+                </a:solidFill>
+                <a:latin typeface="Consolas"/>
+                <a:cs typeface="Consolas"/>
+              </a:rPr>
+              <a:t>LOGICAL STANDBY</a:t>
+            </a:r>
+            <a:r>
+              <a:rPr sz="1600" b="0">
+                <a:solidFill>
+                  <a:srgbClr val="222222"/>
+                </a:solidFill>
+                <a:latin typeface="맑은 고딕"/>
+              </a:rPr>
+              <a:t> / </a:t>
+            </a:r>
+            <a:r>
+              <a:rPr sz="1600" b="0">
+                <a:solidFill>
+                  <a:srgbClr val="222222"/>
+                </a:solidFill>
+                <a:latin typeface="Consolas"/>
+                <a:cs typeface="Consolas"/>
+              </a:rPr>
+              <a:t>CURRENT</a:t>
+            </a:r>
+            <a:r>
+              <a:rPr sz="1600" b="0">
+                <a:solidFill>
+                  <a:srgbClr val="222222"/>
+                </a:solidFill>
+                <a:latin typeface="맑은 고딕"/>
+              </a:rPr>
+              <a:t> / </a:t>
+            </a:r>
+            <a:r>
+              <a:rPr sz="1600" b="0">
+                <a:solidFill>
+                  <a:srgbClr val="222222"/>
+                </a:solidFill>
+                <a:latin typeface="Consolas"/>
+                <a:cs typeface="Consolas"/>
+              </a:rPr>
+              <a:t>GUARD ALL</a:t>
+            </a:r>
+            <a:r>
+              <a:rPr sz="1600" b="0">
+                <a:solidFill>
+                  <a:srgbClr val="222222"/>
+                </a:solidFill>
+                <a:latin typeface="맑은 고딕"/>
+              </a:rPr>
+              <a:t> / </a:t>
+            </a:r>
+            <a:r>
+              <a:rPr sz="1600" b="1">
+                <a:solidFill>
+                  <a:srgbClr val="222222"/>
+                </a:solidFill>
+                <a:latin typeface="Consolas"/>
+                <a:cs typeface="Consolas"/>
+              </a:rPr>
+              <a:t>CDB=YES</a:t>
+            </a:r>
+            <a:r>
+              <a:rPr sz="1600" b="0">
+                <a:solidFill>
+                  <a:srgbClr val="222222"/>
+                </a:solidFill>
+                <a:latin typeface="맑은 고딕"/>
+              </a:rPr>
+              <a:t>.</a:t>
             </a:r>
           </a:p>
         </p:txBody>
@@ -13569,7 +15998,62 @@
                 </a:solidFill>
                 <a:latin typeface="맑은 고딕"/>
               </a:rPr>
-              <a:t>•  MRP 는 뜨지 않는다 — **ORA-01665** (네 번째). `OPEN` 하면 **READ WRITE**.</a:t>
+              <a:t>•  MRP 는 뜨지 않는다 — </a:t>
+            </a:r>
+            <a:r>
+              <a:rPr sz="1600" b="1">
+                <a:solidFill>
+                  <a:srgbClr val="222222"/>
+                </a:solidFill>
+                <a:latin typeface="맑은 고딕"/>
+              </a:rPr>
+              <a:t>ORA-01665</a:t>
+            </a:r>
+            <a:r>
+              <a:rPr sz="1600" b="0">
+                <a:solidFill>
+                  <a:srgbClr val="222222"/>
+                </a:solidFill>
+                <a:latin typeface="맑은 고딕"/>
+              </a:rPr>
+              <a:t> (네 번째). </a:t>
+            </a:r>
+            <a:r>
+              <a:rPr sz="1600" b="0">
+                <a:solidFill>
+                  <a:srgbClr val="222222"/>
+                </a:solidFill>
+                <a:latin typeface="Consolas"/>
+                <a:cs typeface="Consolas"/>
+              </a:rPr>
+              <a:t>OPEN</a:t>
+            </a:r>
+            <a:r>
+              <a:rPr sz="1600" b="0">
+                <a:solidFill>
+                  <a:srgbClr val="222222"/>
+                </a:solidFill>
+                <a:latin typeface="맑은 고딕"/>
+              </a:rPr>
+              <a:t> 하면 </a:t>
+            </a:r>
+            <a:r>
+              <a:rPr sz="1600" b="1">
+                <a:solidFill>
+                  <a:srgbClr val="222222"/>
+                </a:solidFill>
+                <a:latin typeface="맑은 고딕"/>
+              </a:rPr>
+              <a:t>READ WRITE</a:t>
+            </a:r>
+            <a:r>
+              <a:rPr sz="1600" b="0">
+                <a:solidFill>
+                  <a:srgbClr val="222222"/>
+                </a:solidFill>
+                <a:latin typeface="맑은 고딕"/>
+              </a:rPr>
+              <a:t>.</a:t>
             </a:r>
           </a:p>
           <a:p>
@@ -13601,7 +16085,120 @@
                 </a:solidFill>
                 <a:latin typeface="맑은 고딕"/>
               </a:rPr>
-              <a:t>•  `ORA-16111`·`16116`·`16242` 는 **상태 메시지**. `IDLE` 은 정상, `SQL APPLY NOT ON` 이 멈춤.</a:t>
+              <a:t>•  </a:t>
+            </a:r>
+            <a:r>
+              <a:rPr sz="1600" b="0">
+                <a:solidFill>
+                  <a:srgbClr val="222222"/>
+                </a:solidFill>
+                <a:latin typeface="Consolas"/>
+                <a:cs typeface="Consolas"/>
+              </a:rPr>
+              <a:t>ORA-16111</a:t>
+            </a:r>
+            <a:r>
+              <a:rPr sz="1600" b="0">
+                <a:solidFill>
+                  <a:srgbClr val="222222"/>
+                </a:solidFill>
+                <a:latin typeface="맑은 고딕"/>
+              </a:rPr>
+              <a:t>·</a:t>
+            </a:r>
+            <a:r>
+              <a:rPr sz="1600" b="0">
+                <a:solidFill>
+                  <a:srgbClr val="222222"/>
+                </a:solidFill>
+                <a:latin typeface="Consolas"/>
+                <a:cs typeface="Consolas"/>
+              </a:rPr>
+              <a:t>16116</a:t>
+            </a:r>
+            <a:r>
+              <a:rPr sz="1600" b="0">
+                <a:solidFill>
+                  <a:srgbClr val="222222"/>
+                </a:solidFill>
+                <a:latin typeface="맑은 고딕"/>
+              </a:rPr>
+              <a:t>·</a:t>
+            </a:r>
+            <a:r>
+              <a:rPr sz="1600" b="0">
+                <a:solidFill>
+                  <a:srgbClr val="222222"/>
+                </a:solidFill>
+                <a:latin typeface="Consolas"/>
+                <a:cs typeface="Consolas"/>
+              </a:rPr>
+              <a:t>16242</a:t>
+            </a:r>
+            <a:r>
+              <a:rPr sz="1600" b="0">
+                <a:solidFill>
+                  <a:srgbClr val="222222"/>
+                </a:solidFill>
+                <a:latin typeface="맑은 고딕"/>
+              </a:rPr>
+              <a:t> 는 </a:t>
+            </a:r>
+            <a:r>
+              <a:rPr sz="1600" b="1">
+                <a:solidFill>
+                  <a:srgbClr val="222222"/>
+                </a:solidFill>
+                <a:latin typeface="맑은 고딕"/>
+              </a:rPr>
+              <a:t>상태 메시지</a:t>
+            </a:r>
+            <a:r>
+              <a:rPr sz="1600" b="0">
+                <a:solidFill>
+                  <a:srgbClr val="222222"/>
+                </a:solidFill>
+                <a:latin typeface="맑은 고딕"/>
+              </a:rPr>
+              <a:t>. </a:t>
+            </a:r>
+            <a:r>
+              <a:rPr sz="1600" b="0">
+                <a:solidFill>
+                  <a:srgbClr val="222222"/>
+                </a:solidFill>
+                <a:latin typeface="Consolas"/>
+                <a:cs typeface="Consolas"/>
+              </a:rPr>
+              <a:t>IDLE</a:t>
+            </a:r>
+            <a:r>
+              <a:rPr sz="1600" b="0">
+                <a:solidFill>
+                  <a:srgbClr val="222222"/>
+                </a:solidFill>
+                <a:latin typeface="맑은 고딕"/>
+              </a:rPr>
+              <a:t> 은 정상, </a:t>
+            </a:r>
+            <a:r>
+              <a:rPr sz="1600" b="0">
+                <a:solidFill>
+                  <a:srgbClr val="222222"/>
+                </a:solidFill>
+                <a:latin typeface="Consolas"/>
+                <a:cs typeface="Consolas"/>
+              </a:rPr>
+              <a:t>SQL APPLY NOT ON</a:t>
+            </a:r>
+            <a:r>
+              <a:rPr sz="1600" b="0">
+                <a:solidFill>
+                  <a:srgbClr val="222222"/>
+                </a:solidFill>
+                <a:latin typeface="맑은 고딕"/>
+              </a:rPr>
+              <a:t> 이 멈춤.</a:t>
             </a:r>
           </a:p>
           <a:p>
@@ -13617,7 +16214,63 @@
                 </a:solidFill>
                 <a:latin typeface="맑은 고딕"/>
               </a:rPr>
-              <a:t>•  가드 — `STANDBY`·`ALL` 이 같게 동작. **SYS 는 세 값 모두 통과**.</a:t>
+              <a:t>•  가드 — </a:t>
+            </a:r>
+            <a:r>
+              <a:rPr sz="1600" b="0">
+                <a:solidFill>
+                  <a:srgbClr val="222222"/>
+                </a:solidFill>
+                <a:latin typeface="Consolas"/>
+                <a:cs typeface="Consolas"/>
+              </a:rPr>
+              <a:t>STANDBY</a:t>
+            </a:r>
+            <a:r>
+              <a:rPr sz="1600" b="0">
+                <a:solidFill>
+                  <a:srgbClr val="222222"/>
+                </a:solidFill>
+                <a:latin typeface="맑은 고딕"/>
+              </a:rPr>
+              <a:t>·</a:t>
+            </a:r>
+            <a:r>
+              <a:rPr sz="1600" b="0">
+                <a:solidFill>
+                  <a:srgbClr val="222222"/>
+                </a:solidFill>
+                <a:latin typeface="Consolas"/>
+                <a:cs typeface="Consolas"/>
+              </a:rPr>
+              <a:t>ALL</a:t>
+            </a:r>
+            <a:r>
+              <a:rPr sz="1600" b="0">
+                <a:solidFill>
+                  <a:srgbClr val="222222"/>
+                </a:solidFill>
+                <a:latin typeface="맑은 고딕"/>
+              </a:rPr>
+              <a:t> 이 같게 동작. </a:t>
+            </a:r>
+            <a:r>
+              <a:rPr sz="1600" b="1">
+                <a:solidFill>
+                  <a:srgbClr val="222222"/>
+                </a:solidFill>
+                <a:latin typeface="맑은 고딕"/>
+              </a:rPr>
+              <a:t>SYS 는 세 값 모두 통과</a:t>
+            </a:r>
+            <a:r>
+              <a:rPr sz="1600" b="0">
+                <a:solidFill>
+                  <a:srgbClr val="222222"/>
+                </a:solidFill>
+                <a:latin typeface="맑은 고딕"/>
+              </a:rPr>
+              <a:t>.</a:t>
             </a:r>
           </a:p>
           <a:p>
@@ -13633,7 +16286,43 @@
                 </a:solidFill>
                 <a:latin typeface="맑은 고딕"/>
               </a:rPr>
-              <a:t>•  SYS 가 구조를 바꾸면 **ORA-26676**, 값을 바꾸면 **ORA-26786**.</a:t>
+              <a:t>•  SYS 가 구조를 바꾸면 </a:t>
+            </a:r>
+            <a:r>
+              <a:rPr sz="1600" b="1">
+                <a:solidFill>
+                  <a:srgbClr val="222222"/>
+                </a:solidFill>
+                <a:latin typeface="맑은 고딕"/>
+              </a:rPr>
+              <a:t>ORA-26676</a:t>
+            </a:r>
+            <a:r>
+              <a:rPr sz="1600" b="0">
+                <a:solidFill>
+                  <a:srgbClr val="222222"/>
+                </a:solidFill>
+                <a:latin typeface="맑은 고딕"/>
+              </a:rPr>
+              <a:t>, 값을 바꾸면 </a:t>
+            </a:r>
+            <a:r>
+              <a:rPr sz="1600" b="1">
+                <a:solidFill>
+                  <a:srgbClr val="222222"/>
+                </a:solidFill>
+                <a:latin typeface="맑은 고딕"/>
+              </a:rPr>
+              <a:t>ORA-26786</a:t>
+            </a:r>
+            <a:r>
+              <a:rPr sz="1600" b="0">
+                <a:solidFill>
+                  <a:srgbClr val="222222"/>
+                </a:solidFill>
+                <a:latin typeface="맑은 고딕"/>
+              </a:rPr>
+              <a:t>.</a:t>
             </a:r>
           </a:p>
           <a:p>
@@ -13649,7 +16338,62 @@
                 </a:solidFill>
                 <a:latin typeface="맑은 고딕"/>
               </a:rPr>
-              <a:t>•  복구 — `INSTANTIATE_TABLE`. 권한 없으면 **ORA-31631** 이며 **테이블을 지운 뒤** 난다.</a:t>
+              <a:t>•  복구 — </a:t>
+            </a:r>
+            <a:r>
+              <a:rPr sz="1600" b="0">
+                <a:solidFill>
+                  <a:srgbClr val="222222"/>
+                </a:solidFill>
+                <a:latin typeface="Consolas"/>
+                <a:cs typeface="Consolas"/>
+              </a:rPr>
+              <a:t>INSTANTIATE_TABLE</a:t>
+            </a:r>
+            <a:r>
+              <a:rPr sz="1600" b="0">
+                <a:solidFill>
+                  <a:srgbClr val="222222"/>
+                </a:solidFill>
+                <a:latin typeface="맑은 고딕"/>
+              </a:rPr>
+              <a:t>. 권한 없으면 </a:t>
+            </a:r>
+            <a:r>
+              <a:rPr sz="1600" b="1">
+                <a:solidFill>
+                  <a:srgbClr val="222222"/>
+                </a:solidFill>
+                <a:latin typeface="맑은 고딕"/>
+              </a:rPr>
+              <a:t>ORA-31631</a:t>
+            </a:r>
+            <a:r>
+              <a:rPr sz="1600" b="0">
+                <a:solidFill>
+                  <a:srgbClr val="222222"/>
+                </a:solidFill>
+                <a:latin typeface="맑은 고딕"/>
+              </a:rPr>
+              <a:t> 이며 </a:t>
+            </a:r>
+            <a:r>
+              <a:rPr sz="1600" b="1">
+                <a:solidFill>
+                  <a:srgbClr val="222222"/>
+                </a:solidFill>
+                <a:latin typeface="맑은 고딕"/>
+              </a:rPr>
+              <a:t>테이블을 지운 뒤</a:t>
+            </a:r>
+            <a:r>
+              <a:rPr sz="1600" b="0">
+                <a:solidFill>
+                  <a:srgbClr val="222222"/>
+                </a:solidFill>
+                <a:latin typeface="맑은 고딕"/>
+              </a:rPr>
+              <a:t> 난다.</a:t>
             </a:r>
           </a:p>
           <a:p>
@@ -13665,7 +16409,43 @@
                 </a:solidFill>
                 <a:latin typeface="맑은 고딕"/>
               </a:rPr>
-              <a:t>•  가드는 CDB 전체 설정 — PDB 에서 바꾸면 **ORA-65040**. 세션 해제는 권한 없으면 **ORA-01031**.</a:t>
+              <a:t>•  가드는 CDB 전체 설정 — PDB 에서 바꾸면 </a:t>
+            </a:r>
+            <a:r>
+              <a:rPr sz="1600" b="1">
+                <a:solidFill>
+                  <a:srgbClr val="222222"/>
+                </a:solidFill>
+                <a:latin typeface="맑은 고딕"/>
+              </a:rPr>
+              <a:t>ORA-65040</a:t>
+            </a:r>
+            <a:r>
+              <a:rPr sz="1600" b="0">
+                <a:solidFill>
+                  <a:srgbClr val="222222"/>
+                </a:solidFill>
+                <a:latin typeface="맑은 고딕"/>
+              </a:rPr>
+              <a:t>. 세션 해제는 권한 없으면 </a:t>
+            </a:r>
+            <a:r>
+              <a:rPr sz="1600" b="1">
+                <a:solidFill>
+                  <a:srgbClr val="222222"/>
+                </a:solidFill>
+                <a:latin typeface="맑은 고딕"/>
+              </a:rPr>
+              <a:t>ORA-01031</a:t>
+            </a:r>
+            <a:r>
+              <a:rPr sz="1600" b="0">
+                <a:solidFill>
+                  <a:srgbClr val="222222"/>
+                </a:solidFill>
+                <a:latin typeface="맑은 고딕"/>
+              </a:rPr>
+              <a:t>.</a:t>
             </a:r>
           </a:p>
         </p:txBody>
@@ -14080,7 +16860,25 @@
                 </a:solidFill>
                 <a:latin typeface="맑은 고딕"/>
               </a:rPr>
-              <a:t>•  **Physical (Redo Apply)** — "파일 5의 블록 1234가 이렇게 바뀌었다"를 재현</a:t>
+              <a:t>•  </a:t>
+            </a:r>
+            <a:r>
+              <a:rPr sz="1700" b="1">
+                <a:solidFill>
+                  <a:srgbClr val="222222"/>
+                </a:solidFill>
+                <a:latin typeface="맑은 고딕"/>
+              </a:rPr>
+              <a:t>Physical (Redo Apply)</a:t>
+            </a:r>
+            <a:r>
+              <a:rPr sz="1700" b="0">
+                <a:solidFill>
+                  <a:srgbClr val="222222"/>
+                </a:solidFill>
+                <a:latin typeface="맑은 고딕"/>
+              </a:rPr>
+              <a:t> — "파일 5의 블록 1234가 이렇게 바뀌었다"를 재현</a:t>
             </a:r>
           </a:p>
           <a:p>
@@ -14096,7 +16894,25 @@
                 </a:solidFill>
                 <a:latin typeface="맑은 고딕"/>
               </a:rPr>
-              <a:t>•  **Logical (SQL Apply)** — "EMP 사번 7788의 SAL 이 3000→3500" 을 복원해 SQL 실행</a:t>
+              <a:t>•  </a:t>
+            </a:r>
+            <a:r>
+              <a:rPr sz="1700" b="1">
+                <a:solidFill>
+                  <a:srgbClr val="222222"/>
+                </a:solidFill>
+                <a:latin typeface="맑은 고딕"/>
+              </a:rPr>
+              <a:t>Logical (SQL Apply)</a:t>
+            </a:r>
+            <a:r>
+              <a:rPr sz="1700" b="0">
+                <a:solidFill>
+                  <a:srgbClr val="222222"/>
+                </a:solidFill>
+                <a:latin typeface="맑은 고딕"/>
+              </a:rPr>
+              <a:t> — "EMP 사번 7788의 SAL 이 3000→3500" 을 복원해 SQL 실행</a:t>
             </a:r>
           </a:p>
           <a:p>
@@ -14112,7 +16928,16 @@
                 </a:solidFill>
                 <a:latin typeface="맑은 고딕"/>
               </a:rPr>
-              <a:t>•  결과는 같아지지만 **물리 구조는 자유롭다**</a:t>
+              <a:t>•  결과는 같아지지만 </a:t>
+            </a:r>
+            <a:r>
+              <a:rPr sz="1700" b="1">
+                <a:solidFill>
+                  <a:srgbClr val="222222"/>
+                </a:solidFill>
+                <a:latin typeface="맑은 고딕"/>
+              </a:rPr>
+              <a:t>물리 구조는 자유롭다</a:t>
             </a:r>
           </a:p>
           <a:p>
@@ -14307,7 +17132,43 @@
                 </a:solidFill>
                 <a:latin typeface="맑은 고딕"/>
               </a:rPr>
-              <a:t>•  **얻는다** — 자체 인덱스·구체화 뷰 / 열린 채 쓰기 / **일부만 복제** / 롤링 업그레이드</a:t>
+              <a:t>•  </a:t>
+            </a:r>
+            <a:r>
+              <a:rPr sz="1700" b="1">
+                <a:solidFill>
+                  <a:srgbClr val="222222"/>
+                </a:solidFill>
+                <a:latin typeface="맑은 고딕"/>
+              </a:rPr>
+              <a:t>얻는다</a:t>
+            </a:r>
+            <a:r>
+              <a:rPr sz="1700" b="0">
+                <a:solidFill>
+                  <a:srgbClr val="222222"/>
+                </a:solidFill>
+                <a:latin typeface="맑은 고딕"/>
+              </a:rPr>
+              <a:t> — 자체 인덱스·구체화 뷰 / 열린 채 쓰기 / </a:t>
+            </a:r>
+            <a:r>
+              <a:rPr sz="1700" b="1">
+                <a:solidFill>
+                  <a:srgbClr val="222222"/>
+                </a:solidFill>
+                <a:latin typeface="맑은 고딕"/>
+              </a:rPr>
+              <a:t>일부만 복제</a:t>
+            </a:r>
+            <a:r>
+              <a:rPr sz="1700" b="0">
+                <a:solidFill>
+                  <a:srgbClr val="222222"/>
+                </a:solidFill>
+                <a:latin typeface="맑은 고딕"/>
+              </a:rPr>
+              <a:t> / 롤링 업그레이드</a:t>
             </a:r>
           </a:p>
           <a:p>
@@ -14323,7 +17184,43 @@
                 </a:solidFill>
                 <a:latin typeface="맑은 고딕"/>
               </a:rPr>
-              <a:t>•  **잃는다** — **데이터 타입 제약** / 느린 적용 / 많은 관리 부담</a:t>
+              <a:t>•  </a:t>
+            </a:r>
+            <a:r>
+              <a:rPr sz="1700" b="1">
+                <a:solidFill>
+                  <a:srgbClr val="222222"/>
+                </a:solidFill>
+                <a:latin typeface="맑은 고딕"/>
+              </a:rPr>
+              <a:t>잃는다</a:t>
+            </a:r>
+            <a:r>
+              <a:rPr sz="1700" b="0">
+                <a:solidFill>
+                  <a:srgbClr val="222222"/>
+                </a:solidFill>
+                <a:latin typeface="맑은 고딕"/>
+              </a:rPr>
+              <a:t> — </a:t>
+            </a:r>
+            <a:r>
+              <a:rPr sz="1700" b="1">
+                <a:solidFill>
+                  <a:srgbClr val="222222"/>
+                </a:solidFill>
+                <a:latin typeface="맑은 고딕"/>
+              </a:rPr>
+              <a:t>데이터 타입 제약</a:t>
+            </a:r>
+            <a:r>
+              <a:rPr sz="1700" b="0">
+                <a:solidFill>
+                  <a:srgbClr val="222222"/>
+                </a:solidFill>
+                <a:latin typeface="맑은 고딕"/>
+              </a:rPr>
+              <a:t> / 느린 적용 / 많은 관리 부담</a:t>
             </a:r>
           </a:p>
           <a:p>
@@ -14339,7 +17236,25 @@
                 </a:solidFill>
                 <a:latin typeface="맑은 고딕"/>
               </a:rPr>
-              <a:t>•  **되돌릴 수 없다** — Physical 로 돌아가는 명령이 없다</a:t>
+              <a:t>•  </a:t>
+            </a:r>
+            <a:r>
+              <a:rPr sz="1700" b="1">
+                <a:solidFill>
+                  <a:srgbClr val="222222"/>
+                </a:solidFill>
+                <a:latin typeface="맑은 고딕"/>
+              </a:rPr>
+              <a:t>되돌릴 수 없다</a:t>
+            </a:r>
+            <a:r>
+              <a:rPr sz="1700" b="0">
+                <a:solidFill>
+                  <a:srgbClr val="222222"/>
+                </a:solidFill>
+                <a:latin typeface="맑은 고딕"/>
+              </a:rPr>
+              <a:t> — Physical 로 돌아가는 명령이 없다</a:t>
             </a:r>
           </a:p>
           <a:p>
@@ -14355,7 +17270,25 @@
                 </a:solidFill>
                 <a:latin typeface="맑은 고딕"/>
               </a:rPr>
-              <a:t>•  Logical Standby 는 **재해 복구 도구가 아니라 활용 도구**다</a:t>
+              <a:t>•  Logical Standby 는 </a:t>
+            </a:r>
+            <a:r>
+              <a:rPr sz="1700" b="1">
+                <a:solidFill>
+                  <a:srgbClr val="222222"/>
+                </a:solidFill>
+                <a:latin typeface="맑은 고딕"/>
+              </a:rPr>
+              <a:t>재해 복구 도구가 아니라 활용 도구</a:t>
+            </a:r>
+            <a:r>
+              <a:rPr sz="1700" b="0">
+                <a:solidFill>
+                  <a:srgbClr val="222222"/>
+                </a:solidFill>
+                <a:latin typeface="맑은 고딕"/>
+              </a:rPr>
+              <a:t>다</a:t>
             </a:r>
           </a:p>
         </p:txBody>
@@ -14534,7 +17467,25 @@
                 </a:solidFill>
                 <a:latin typeface="맑은 고딕"/>
               </a:rPr>
-              <a:t>•  **Logical Standby** — Data Guard 구성원. 역할 전환 대상. Broker 로 관리</a:t>
+              <a:t>•  </a:t>
+            </a:r>
+            <a:r>
+              <a:rPr sz="1700" b="1">
+                <a:solidFill>
+                  <a:srgbClr val="222222"/>
+                </a:solidFill>
+                <a:latin typeface="맑은 고딕"/>
+              </a:rPr>
+              <a:t>Logical Standby</a:t>
+            </a:r>
+            <a:r>
+              <a:rPr sz="1700" b="0">
+                <a:solidFill>
+                  <a:srgbClr val="222222"/>
+                </a:solidFill>
+                <a:latin typeface="맑은 고딕"/>
+              </a:rPr>
+              <a:t> — Data Guard 구성원. 역할 전환 대상. Broker 로 관리</a:t>
             </a:r>
           </a:p>
           <a:p>
@@ -14550,7 +17501,25 @@
                 </a:solidFill>
                 <a:latin typeface="맑은 고딕"/>
               </a:rPr>
-              <a:t>•  **논리적 백업(export)** — 시점 사본. 따라오지 않는다</a:t>
+              <a:t>•  </a:t>
+            </a:r>
+            <a:r>
+              <a:rPr sz="1700" b="1">
+                <a:solidFill>
+                  <a:srgbClr val="222222"/>
+                </a:solidFill>
+                <a:latin typeface="맑은 고딕"/>
+              </a:rPr>
+              <a:t>논리적 백업(export)</a:t>
+            </a:r>
+            <a:r>
+              <a:rPr sz="1700" b="0">
+                <a:solidFill>
+                  <a:srgbClr val="222222"/>
+                </a:solidFill>
+                <a:latin typeface="맑은 고딕"/>
+              </a:rPr>
+              <a:t> — 시점 사본. 따라오지 않는다</a:t>
             </a:r>
           </a:p>
           <a:p>
@@ -14566,7 +17535,25 @@
                 </a:solidFill>
                 <a:latin typeface="맑은 고딕"/>
               </a:rPr>
-              <a:t>•  **GoldenGate** — 별도 제품. 이기종·양방향. 라이선스 별도</a:t>
+              <a:t>•  </a:t>
+            </a:r>
+            <a:r>
+              <a:rPr sz="1700" b="1">
+                <a:solidFill>
+                  <a:srgbClr val="222222"/>
+                </a:solidFill>
+                <a:latin typeface="맑은 고딕"/>
+              </a:rPr>
+              <a:t>GoldenGate</a:t>
+            </a:r>
+            <a:r>
+              <a:rPr sz="1700" b="0">
+                <a:solidFill>
+                  <a:srgbClr val="222222"/>
+                </a:solidFill>
+                <a:latin typeface="맑은 고딕"/>
+              </a:rPr>
+              <a:t> — 별도 제품. 이기종·양방향. 라이선스 별도</a:t>
             </a:r>
           </a:p>
           <a:p>
@@ -15016,7 +18003,35 @@
                 </a:solidFill>
                 <a:latin typeface="맑은 고딕"/>
               </a:rPr>
-              <a:t>•  `DBA_LOGSTDBY_UNSUPPORTED` — 지원 안 되는 컬럼. **실습 0행**</a:t>
+              <a:t>•  </a:t>
+            </a:r>
+            <a:r>
+              <a:rPr sz="1700" b="0">
+                <a:solidFill>
+                  <a:srgbClr val="222222"/>
+                </a:solidFill>
+                <a:latin typeface="Consolas"/>
+                <a:cs typeface="Consolas"/>
+              </a:rPr>
+              <a:t>DBA_LOGSTDBY_UNSUPPORTED</a:t>
+            </a:r>
+            <a:r>
+              <a:rPr sz="1700" b="0">
+                <a:solidFill>
+                  <a:srgbClr val="222222"/>
+                </a:solidFill>
+                <a:latin typeface="맑은 고딕"/>
+              </a:rPr>
+              <a:t> — 지원 안 되는 컬럼. </a:t>
+            </a:r>
+            <a:r>
+              <a:rPr sz="1700" b="1">
+                <a:solidFill>
+                  <a:srgbClr val="222222"/>
+                </a:solidFill>
+                <a:latin typeface="맑은 고딕"/>
+              </a:rPr>
+              <a:t>실습 0행</a:t>
             </a:r>
           </a:p>
           <a:p>
@@ -15032,7 +18047,35 @@
                 </a:solidFill>
                 <a:latin typeface="맑은 고딕"/>
               </a:rPr>
-              <a:t>•  `DBA_LOGSTDBY_NOT_UNIQUE` — 고유 식별자 없는 테이블. **실습 0행**</a:t>
+              <a:t>•  </a:t>
+            </a:r>
+            <a:r>
+              <a:rPr sz="1700" b="0">
+                <a:solidFill>
+                  <a:srgbClr val="222222"/>
+                </a:solidFill>
+                <a:latin typeface="Consolas"/>
+                <a:cs typeface="Consolas"/>
+              </a:rPr>
+              <a:t>DBA_LOGSTDBY_NOT_UNIQUE</a:t>
+            </a:r>
+            <a:r>
+              <a:rPr sz="1700" b="0">
+                <a:solidFill>
+                  <a:srgbClr val="222222"/>
+                </a:solidFill>
+                <a:latin typeface="맑은 고딕"/>
+              </a:rPr>
+              <a:t> — 고유 식별자 없는 테이블. </a:t>
+            </a:r>
+            <a:r>
+              <a:rPr sz="1700" b="1">
+                <a:solidFill>
+                  <a:srgbClr val="222222"/>
+                </a:solidFill>
+                <a:latin typeface="맑은 고딕"/>
+              </a:rPr>
+              <a:t>실습 0행</a:t>
             </a:r>
           </a:p>
           <a:p>
@@ -15048,7 +18091,35 @@
                 </a:solidFill>
                 <a:latin typeface="맑은 고딕"/>
               </a:rPr>
-              <a:t>•  `DBA_LOGSTDBY_SKIP` — 스킵 규칙. **기본 35개**</a:t>
+              <a:t>•  </a:t>
+            </a:r>
+            <a:r>
+              <a:rPr sz="1700" b="0">
+                <a:solidFill>
+                  <a:srgbClr val="222222"/>
+                </a:solidFill>
+                <a:latin typeface="Consolas"/>
+                <a:cs typeface="Consolas"/>
+              </a:rPr>
+              <a:t>DBA_LOGSTDBY_SKIP</a:t>
+            </a:r>
+            <a:r>
+              <a:rPr sz="1700" b="0">
+                <a:solidFill>
+                  <a:srgbClr val="222222"/>
+                </a:solidFill>
+                <a:latin typeface="맑은 고딕"/>
+              </a:rPr>
+              <a:t> — 스킵 규칙. </a:t>
+            </a:r>
+            <a:r>
+              <a:rPr sz="1700" b="1">
+                <a:solidFill>
+                  <a:srgbClr val="222222"/>
+                </a:solidFill>
+                <a:latin typeface="맑은 고딕"/>
+              </a:rPr>
+              <a:t>기본 35개</a:t>
             </a:r>
           </a:p>
           <a:p>
@@ -15064,7 +18135,45 @@
                 </a:solidFill>
                 <a:latin typeface="맑은 고딕"/>
               </a:rPr>
-              <a:t>•  뷰 이름은 `SKIP` 이다 (`SKIPPED` 아님)</a:t>
+              <a:t>•  뷰 이름은 </a:t>
+            </a:r>
+            <a:r>
+              <a:rPr sz="1700" b="0">
+                <a:solidFill>
+                  <a:srgbClr val="222222"/>
+                </a:solidFill>
+                <a:latin typeface="Consolas"/>
+                <a:cs typeface="Consolas"/>
+              </a:rPr>
+              <a:t>SKIP</a:t>
+            </a:r>
+            <a:r>
+              <a:rPr sz="1700" b="0">
+                <a:solidFill>
+                  <a:srgbClr val="222222"/>
+                </a:solidFill>
+                <a:latin typeface="맑은 고딕"/>
+              </a:rPr>
+              <a:t> 이다 (</a:t>
+            </a:r>
+            <a:r>
+              <a:rPr sz="1700" b="0">
+                <a:solidFill>
+                  <a:srgbClr val="222222"/>
+                </a:solidFill>
+                <a:latin typeface="Consolas"/>
+                <a:cs typeface="Consolas"/>
+              </a:rPr>
+              <a:t>SKIPPED</a:t>
+            </a:r>
+            <a:r>
+              <a:rPr sz="1700" b="0">
+                <a:solidFill>
+                  <a:srgbClr val="222222"/>
+                </a:solidFill>
+                <a:latin typeface="맑은 고딕"/>
+              </a:rPr>
+              <a:t> 아님)</a:t>
             </a:r>
           </a:p>
         </p:txBody>
